--- a/KNB_Social_Media_Agent_Formatted_Presentation.pptx
+++ b/KNB_Social_Media_Agent_Formatted_Presentation.pptx
@@ -122,7 +122,7 @@
   </p:defaultTextStyle>
   <p:extLst>
     <p:ext uri="{EFAFB233-063F-42B5-8137-9DF3F51BA10A}">
-      <p15:sldGuideLst xmlns="" xmlns:p15="http://schemas.microsoft.com/office/powerpoint/2012/main"/>
+      <p15:sldGuideLst xmlns:p15="http://schemas.microsoft.com/office/powerpoint/2012/main" xmlns=""/>
     </p:ext>
   </p:extLst>
 </p:presentation>
@@ -4269,7 +4269,7 @@
           <p:cNvPr id="2" name="Title 1">
             <a:extLst>
               <a:ext uri="{FF2B5EF4-FFF2-40B4-BE49-F238E27FC236}">
-                <a16:creationId xmlns="" xmlns:a16="http://schemas.microsoft.com/office/drawing/2014/main" id="{970899AD-1C63-F328-ED69-02D17CF3D411}"/>
+                <a16:creationId xmlns:a16="http://schemas.microsoft.com/office/drawing/2014/main" xmlns="" id="{970899AD-1C63-F328-ED69-02D17CF3D411}"/>
               </a:ext>
             </a:extLst>
           </p:cNvPr>
@@ -4352,7 +4352,7 @@
           <p:cNvPr id="3" name="Subtitle 2">
             <a:extLst>
               <a:ext uri="{FF2B5EF4-FFF2-40B4-BE49-F238E27FC236}">
-                <a16:creationId xmlns="" xmlns:a16="http://schemas.microsoft.com/office/drawing/2014/main" id="{3DDDC847-DCC5-73F1-3166-8CB83021E353}"/>
+                <a16:creationId xmlns:a16="http://schemas.microsoft.com/office/drawing/2014/main" xmlns="" id="{3DDDC847-DCC5-73F1-3166-8CB83021E353}"/>
               </a:ext>
             </a:extLst>
           </p:cNvPr>
@@ -4554,7 +4554,7 @@
           <p:cNvPr id="4" name="Title 1">
             <a:extLst>
               <a:ext uri="{FF2B5EF4-FFF2-40B4-BE49-F238E27FC236}">
-                <a16:creationId xmlns="" xmlns:a16="http://schemas.microsoft.com/office/drawing/2014/main" id="{927FC38E-5607-D503-CC89-CEAE270BBB54}"/>
+                <a16:creationId xmlns:a16="http://schemas.microsoft.com/office/drawing/2014/main" xmlns="" id="{927FC38E-5607-D503-CC89-CEAE270BBB54}"/>
               </a:ext>
             </a:extLst>
           </p:cNvPr>
@@ -4663,7 +4663,7 @@
           <p:cNvPr id="11" name="Date Placeholder 10">
             <a:extLst>
               <a:ext uri="{FF2B5EF4-FFF2-40B4-BE49-F238E27FC236}">
-                <a16:creationId xmlns="" xmlns:a16="http://schemas.microsoft.com/office/drawing/2014/main" id="{D65E36BC-99A0-200E-4D6C-13974E288826}"/>
+                <a16:creationId xmlns:a16="http://schemas.microsoft.com/office/drawing/2014/main" xmlns="" id="{D65E36BC-99A0-200E-4D6C-13974E288826}"/>
               </a:ext>
             </a:extLst>
           </p:cNvPr>
@@ -4697,7 +4697,7 @@
           <p:cNvPr id="13" name="Slide Number Placeholder 12">
             <a:extLst>
               <a:ext uri="{FF2B5EF4-FFF2-40B4-BE49-F238E27FC236}">
-                <a16:creationId xmlns="" xmlns:a16="http://schemas.microsoft.com/office/drawing/2014/main" id="{82966C9D-8540-8AC0-305E-CA27AA3646C5}"/>
+                <a16:creationId xmlns:a16="http://schemas.microsoft.com/office/drawing/2014/main" xmlns="" id="{82966C9D-8540-8AC0-305E-CA27AA3646C5}"/>
               </a:ext>
             </a:extLst>
           </p:cNvPr>
@@ -5225,8 +5225,16 @@
           <a:lstStyle/>
           <a:p>
             <a:r>
+              <a:rPr lang="en-IN" dirty="0"/>
+              <a:t>GITHUB LINK</a:t>
+            </a:r>
+            <a:r>
               <a:rPr lang="en-IN"/>
-              <a:t>GITHUB LINK: https://github.com/dharmeshbpatel-sudo/Social-Media-Agent-</a:t>
+              <a:t>: </a:t>
+            </a:r>
+            <a:r>
+              <a:rPr lang="en-IN"/>
+              <a:t>https://github.com/keyurbrahmbhatt-eng/social-media-agent-repo/tree/main</a:t>
             </a:r>
             <a:endParaRPr lang="en-IN" dirty="0"/>
           </a:p>
@@ -5497,7 +5505,7 @@
           <p:cNvPr id="9" name="Content Placeholder 2">
             <a:extLst>
               <a:ext uri="{FF2B5EF4-FFF2-40B4-BE49-F238E27FC236}">
-                <a16:creationId xmlns="" xmlns:a16="http://schemas.microsoft.com/office/drawing/2014/main" id="{F8DBFB98-934B-0F86-D0EF-7E72A0040514}"/>
+                <a16:creationId xmlns:a16="http://schemas.microsoft.com/office/drawing/2014/main" xmlns="" id="{F8DBFB98-934B-0F86-D0EF-7E72A0040514}"/>
               </a:ext>
             </a:extLst>
           </p:cNvPr>
@@ -7135,7 +7143,7 @@
   <a:extraClrSchemeLst/>
   <a:extLst>
     <a:ext uri="{05A4C25C-085E-4340-85A3-A5531E510DB2}">
-      <thm15:themeFamily xmlns="" xmlns:thm15="http://schemas.microsoft.com/office/thememl/2012/main" name="Dividend" id="{9697A71B-4AB7-4A1A-BD5B-BB2D22835B57}" vid="{C21699FF-00E4-43C8-BBCC-D7E5536C3717}"/>
+      <thm15:themeFamily xmlns:thm15="http://schemas.microsoft.com/office/thememl/2012/main" xmlns="" name="Dividend" id="{9697A71B-4AB7-4A1A-BD5B-BB2D22835B57}" vid="{C21699FF-00E4-43C8-BBCC-D7E5536C3717}"/>
     </a:ext>
   </a:extLst>
 </a:theme>
@@ -7430,7 +7438,7 @@
   <a:extraClrSchemeLst/>
   <a:extLst>
     <a:ext uri="{05A4C25C-085E-4340-85A3-A5531E510DB2}">
-      <thm15:themeFamily xmlns="" xmlns:thm15="http://schemas.microsoft.com/office/thememl/2012/main" name="Office Theme" id="{62F939B6-93AF-4DB8-9C6B-D6C7DFDC589F}" vid="{4A3C46E8-61CC-4603-A589-7422A47A8E4A}"/>
+      <thm15:themeFamily xmlns:thm15="http://schemas.microsoft.com/office/thememl/2012/main" xmlns="" name="Office Theme" id="{62F939B6-93AF-4DB8-9C6B-D6C7DFDC589F}" vid="{4A3C46E8-61CC-4603-A589-7422A47A8E4A}"/>
     </a:ext>
   </a:extLst>
 </a:theme>

--- a/KNB_Social_Media_Agent_Formatted_Presentation.pptx
+++ b/KNB_Social_Media_Agent_Formatted_Presentation.pptx
@@ -2,7 +2,7 @@
 <file path=ppt/presentation.xml><?xml version="1.0" encoding="utf-8"?>
 <p:presentation xmlns:a="http://schemas.openxmlformats.org/drawingml/2006/main" xmlns:r="http://schemas.openxmlformats.org/officeDocument/2006/relationships" xmlns:p="http://schemas.openxmlformats.org/presentationml/2006/main" saveSubsetFonts="1">
   <p:sldMasterIdLst>
-    <p:sldMasterId id="2147483660" r:id="rId1"/>
+    <p:sldMasterId id="2147483672" r:id="rId1"/>
   </p:sldMasterIdLst>
   <p:notesMasterIdLst>
     <p:notesMasterId r:id="rId16"/>
@@ -122,7 +122,7 @@
   </p:defaultTextStyle>
   <p:extLst>
     <p:ext uri="{EFAFB233-063F-42B5-8137-9DF3F51BA10A}">
-      <p15:sldGuideLst xmlns:p15="http://schemas.microsoft.com/office/powerpoint/2012/main" xmlns=""/>
+      <p15:sldGuideLst xmlns="" xmlns:p15="http://schemas.microsoft.com/office/powerpoint/2012/main"/>
     </p:ext>
   </p:extLst>
 </p:presentation>
@@ -210,7 +210,7 @@
           <a:p>
             <a:fld id="{8E90DF8A-25F7-46FB-B173-13B8FB12E85A}" type="datetimeFigureOut">
               <a:rPr lang="en-IN" smtClean="0"/>
-              <a:t>16-07-2026</a:t>
+              <a:t>21-07-2026</a:t>
             </a:fld>
             <a:endParaRPr lang="en-IN"/>
           </a:p>
@@ -497,106 +497,58 @@
       </p:grpSpPr>
       <p:sp>
         <p:nvSpPr>
-          <p:cNvPr id="7" name="Rectangle 6"/>
-          <p:cNvSpPr/>
-          <p:nvPr/>
+          <p:cNvPr id="2" name="Title 1"/>
+          <p:cNvSpPr>
+            <a:spLocks noGrp="1"/>
+          </p:cNvSpPr>
+          <p:nvPr>
+            <p:ph type="ctrTitle"/>
+          </p:nvPr>
         </p:nvSpPr>
         <p:spPr>
           <a:xfrm>
-            <a:off x="446534" y="3085765"/>
-            <a:ext cx="11262866" cy="3304800"/>
+            <a:off x="914400" y="2130428"/>
+            <a:ext cx="10363200" cy="1470025"/>
           </a:xfrm>
-          <a:prstGeom prst="rect">
-            <a:avLst/>
-          </a:prstGeom>
-          <a:solidFill>
-            <a:schemeClr val="accent1"/>
-          </a:solidFill>
-          <a:ln>
-            <a:noFill/>
-          </a:ln>
-          <a:effectLst/>
         </p:spPr>
-        <p:style>
-          <a:lnRef idx="1">
-            <a:schemeClr val="accent1"/>
-          </a:lnRef>
-          <a:fillRef idx="3">
-            <a:schemeClr val="accent1"/>
-          </a:fillRef>
-          <a:effectRef idx="2">
-            <a:schemeClr val="accent1"/>
-          </a:effectRef>
-          <a:fontRef idx="minor">
-            <a:schemeClr val="lt1"/>
-          </a:fontRef>
-        </p:style>
-      </p:sp>
-      <p:sp>
-        <p:nvSpPr>
-          <p:cNvPr id="2" name="Title 1"/>
-          <p:cNvSpPr>
-            <a:spLocks noGrp="1"/>
-          </p:cNvSpPr>
-          <p:nvPr>
-            <p:ph type="ctrTitle"/>
+        <p:txBody>
+          <a:bodyPr/>
+          <a:lstStyle/>
+          <a:p>
+            <a:r>
+              <a:rPr lang="en-US" smtClean="0"/>
+              <a:t>Click to edit Master title style</a:t>
+            </a:r>
+            <a:endParaRPr lang="en-IN"/>
+          </a:p>
+        </p:txBody>
+      </p:sp>
+      <p:sp>
+        <p:nvSpPr>
+          <p:cNvPr id="3" name="Subtitle 2"/>
+          <p:cNvSpPr>
+            <a:spLocks noGrp="1"/>
+          </p:cNvSpPr>
+          <p:nvPr>
+            <p:ph type="subTitle" idx="1"/>
           </p:nvPr>
         </p:nvSpPr>
         <p:spPr>
           <a:xfrm>
-            <a:off x="581191" y="1020431"/>
-            <a:ext cx="10993549" cy="1475013"/>
-          </a:xfrm>
-          <a:effectLst/>
-        </p:spPr>
-        <p:txBody>
-          <a:bodyPr anchor="b">
-            <a:normAutofit/>
-          </a:bodyPr>
-          <a:lstStyle>
-            <a:lvl1pPr>
-              <a:defRPr sz="3600">
-                <a:solidFill>
-                  <a:schemeClr val="accent1"/>
-                </a:solidFill>
-              </a:defRPr>
-            </a:lvl1pPr>
-          </a:lstStyle>
-          <a:p>
-            <a:r>
-              <a:rPr lang="en-US"/>
-              <a:t>Click to edit Master title style</a:t>
-            </a:r>
-            <a:endParaRPr lang="en-US" dirty="0"/>
-          </a:p>
-        </p:txBody>
-      </p:sp>
-      <p:sp>
-        <p:nvSpPr>
-          <p:cNvPr id="3" name="Subtitle 2"/>
-          <p:cNvSpPr>
-            <a:spLocks noGrp="1"/>
-          </p:cNvSpPr>
-          <p:nvPr>
-            <p:ph type="subTitle" idx="1"/>
-          </p:nvPr>
-        </p:nvSpPr>
-        <p:spPr>
-          <a:xfrm>
-            <a:off x="581194" y="2495445"/>
-            <a:ext cx="10993546" cy="590321"/>
+            <a:off x="1828800" y="3886200"/>
+            <a:ext cx="8534400" cy="1752600"/>
           </a:xfrm>
         </p:spPr>
         <p:txBody>
-          <a:bodyPr anchor="t">
-            <a:normAutofit/>
-          </a:bodyPr>
+          <a:bodyPr/>
           <a:lstStyle>
-            <a:lvl1pPr marL="0" indent="0" algn="l">
-              <a:buNone/>
-              <a:defRPr sz="1600" cap="all">
+            <a:lvl1pPr marL="0" indent="0" algn="ctr">
+              <a:buNone/>
+              <a:defRPr>
                 <a:solidFill>
-                  <a:schemeClr val="accent2"/>
+                  <a:schemeClr val="tx1">
+                    <a:tint val="75000"/>
+                  </a:schemeClr>
                 </a:solidFill>
               </a:defRPr>
             </a:lvl1pPr>
@@ -683,10 +635,10 @@
           </a:lstStyle>
           <a:p>
             <a:r>
-              <a:rPr lang="en-US"/>
+              <a:rPr lang="en-US" smtClean="0"/>
               <a:t>Click to edit Master subtitle style</a:t>
             </a:r>
-            <a:endParaRPr lang="en-US" dirty="0"/>
+            <a:endParaRPr lang="en-IN"/>
           </a:p>
         </p:txBody>
       </p:sp>
@@ -700,30 +652,14 @@
             <p:ph type="dt" sz="half" idx="10"/>
           </p:nvPr>
         </p:nvSpPr>
-        <p:spPr>
-          <a:xfrm>
-            <a:off x="7605951" y="5956137"/>
-            <a:ext cx="2844800" cy="365125"/>
-          </a:xfrm>
-        </p:spPr>
-        <p:txBody>
-          <a:bodyPr/>
-          <a:lstStyle>
-            <a:lvl1pPr>
-              <a:defRPr>
-                <a:solidFill>
-                  <a:schemeClr val="accent1">
-                    <a:lumMod val="75000"/>
-                    <a:lumOff val="25000"/>
-                  </a:schemeClr>
-                </a:solidFill>
-              </a:defRPr>
-            </a:lvl1pPr>
-          </a:lstStyle>
+        <p:spPr/>
+        <p:txBody>
+          <a:bodyPr/>
+          <a:lstStyle/>
           <a:p>
             <a:fld id="{11867D23-C1C8-4D15-A914-23EAAEEC57F2}" type="datetime1">
               <a:rPr lang="en-IN" smtClean="0"/>
-              <a:t>16-07-2026</a:t>
+              <a:t>21-07-2026</a:t>
             </a:fld>
             <a:endParaRPr lang="en-IN"/>
           </a:p>
@@ -739,31 +675,16 @@
             <p:ph type="ftr" sz="quarter" idx="11"/>
           </p:nvPr>
         </p:nvSpPr>
-        <p:spPr>
-          <a:xfrm>
-            <a:off x="581192" y="5951811"/>
-            <a:ext cx="6917210" cy="365125"/>
-          </a:xfrm>
-        </p:spPr>
-        <p:txBody>
-          <a:bodyPr/>
-          <a:lstStyle>
-            <a:lvl1pPr>
-              <a:defRPr>
-                <a:solidFill>
-                  <a:schemeClr val="accent1">
-                    <a:lumMod val="75000"/>
-                    <a:lumOff val="25000"/>
-                  </a:schemeClr>
-                </a:solidFill>
-              </a:defRPr>
-            </a:lvl1pPr>
-          </a:lstStyle>
-          <a:p>
-            <a:r>
-              <a:rPr lang="en-IN"/>
+        <p:spPr/>
+        <p:txBody>
+          <a:bodyPr/>
+          <a:lstStyle/>
+          <a:p>
+            <a:r>
+              <a:rPr lang="en-IN" smtClean="0"/>
               <a:t>Doctoral Progress Committee - I</a:t>
             </a:r>
+            <a:endParaRPr lang="en-IN"/>
           </a:p>
         </p:txBody>
       </p:sp>
@@ -777,26 +698,10 @@
             <p:ph type="sldNum" sz="quarter" idx="12"/>
           </p:nvPr>
         </p:nvSpPr>
-        <p:spPr>
-          <a:xfrm>
-            <a:off x="10558300" y="5956137"/>
-            <a:ext cx="1016440" cy="365125"/>
-          </a:xfrm>
-        </p:spPr>
-        <p:txBody>
-          <a:bodyPr/>
-          <a:lstStyle>
-            <a:lvl1pPr>
-              <a:defRPr>
-                <a:solidFill>
-                  <a:schemeClr val="accent1">
-                    <a:lumMod val="75000"/>
-                    <a:lumOff val="25000"/>
-                  </a:schemeClr>
-                </a:solidFill>
-              </a:defRPr>
-            </a:lvl1pPr>
-          </a:lstStyle>
+        <p:spPr/>
+        <p:txBody>
+          <a:bodyPr/>
+          <a:lstStyle/>
           <a:p>
             <a:fld id="{8D1C8765-CB22-4976-8758-5A372A2DCF34}" type="slidenum">
               <a:rPr lang="en-IN" smtClean="0"/>
@@ -809,7 +714,7 @@
     </p:spTree>
     <p:extLst>
       <p:ext uri="{BB962C8B-B14F-4D97-AF65-F5344CB8AC3E}">
-        <p14:creationId xmlns:p14="http://schemas.microsoft.com/office/powerpoint/2010/main" val="1837549843"/>
+        <p14:creationId xmlns:p14="http://schemas.microsoft.com/office/powerpoint/2010/main" val="3698484020"/>
       </p:ext>
     </p:extLst>
   </p:cSld>
@@ -838,46 +743,7 @@
       </p:grpSpPr>
       <p:sp>
         <p:nvSpPr>
-          <p:cNvPr id="8" name="Rectangle 7"/>
-          <p:cNvSpPr>
-            <a:spLocks noChangeAspect="1"/>
-          </p:cNvSpPr>
-          <p:nvPr/>
-        </p:nvSpPr>
-        <p:spPr>
-          <a:xfrm>
-            <a:off x="440286" y="614407"/>
-            <a:ext cx="11309338" cy="1189298"/>
-          </a:xfrm>
-          <a:prstGeom prst="rect">
-            <a:avLst/>
-          </a:prstGeom>
-          <a:solidFill>
-            <a:schemeClr val="accent1"/>
-          </a:solidFill>
-          <a:ln>
-            <a:noFill/>
-          </a:ln>
-          <a:effectLst/>
-        </p:spPr>
-        <p:style>
-          <a:lnRef idx="1">
-            <a:schemeClr val="accent1"/>
-          </a:lnRef>
-          <a:fillRef idx="3">
-            <a:schemeClr val="accent1"/>
-          </a:fillRef>
-          <a:effectRef idx="2">
-            <a:schemeClr val="accent1"/>
-          </a:effectRef>
-          <a:fontRef idx="minor">
-            <a:schemeClr val="lt1"/>
-          </a:fontRef>
-        </p:style>
-      </p:sp>
-      <p:sp>
-        <p:nvSpPr>
-          <p:cNvPr id="9" name="Title 1"/>
+          <p:cNvPr id="2" name="Title 1"/>
           <p:cNvSpPr>
             <a:spLocks noGrp="1"/>
           </p:cNvSpPr>
@@ -885,21 +751,16 @@
             <p:ph type="title"/>
           </p:nvPr>
         </p:nvSpPr>
-        <p:spPr>
-          <a:xfrm>
-            <a:off x="581192" y="702156"/>
-            <a:ext cx="11029616" cy="1013800"/>
-          </a:xfrm>
-        </p:spPr>
-        <p:txBody>
-          <a:bodyPr/>
-          <a:lstStyle/>
-          <a:p>
-            <a:r>
-              <a:rPr lang="en-US"/>
+        <p:spPr/>
+        <p:txBody>
+          <a:bodyPr/>
+          <a:lstStyle/>
+          <a:p>
+            <a:r>
+              <a:rPr lang="en-US" smtClean="0"/>
               <a:t>Click to edit Master title style</a:t>
             </a:r>
-            <a:endParaRPr lang="en-US" dirty="0"/>
+            <a:endParaRPr lang="en-IN"/>
           </a:p>
         </p:txBody>
       </p:sp>
@@ -915,59 +776,43 @@
         </p:nvSpPr>
         <p:spPr/>
         <p:txBody>
-          <a:bodyPr vert="eaVert" anchor="t"/>
-          <a:lstStyle>
-            <a:lvl1pPr algn="l">
-              <a:defRPr/>
-            </a:lvl1pPr>
-            <a:lvl2pPr algn="l">
-              <a:defRPr/>
-            </a:lvl2pPr>
-            <a:lvl3pPr algn="l">
-              <a:defRPr/>
-            </a:lvl3pPr>
-            <a:lvl4pPr algn="l">
-              <a:defRPr/>
-            </a:lvl4pPr>
-            <a:lvl5pPr algn="l">
-              <a:defRPr/>
-            </a:lvl5pPr>
-          </a:lstStyle>
+          <a:bodyPr vert="eaVert"/>
+          <a:lstStyle/>
           <a:p>
             <a:pPr lvl="0"/>
             <a:r>
-              <a:rPr lang="en-US"/>
+              <a:rPr lang="en-US" smtClean="0"/>
               <a:t>Click to edit Master text styles</a:t>
             </a:r>
           </a:p>
           <a:p>
             <a:pPr lvl="1"/>
             <a:r>
-              <a:rPr lang="en-US"/>
+              <a:rPr lang="en-US" smtClean="0"/>
               <a:t>Second level</a:t>
             </a:r>
           </a:p>
           <a:p>
             <a:pPr lvl="2"/>
             <a:r>
-              <a:rPr lang="en-US"/>
+              <a:rPr lang="en-US" smtClean="0"/>
               <a:t>Third level</a:t>
             </a:r>
           </a:p>
           <a:p>
             <a:pPr lvl="3"/>
             <a:r>
-              <a:rPr lang="en-US"/>
+              <a:rPr lang="en-US" smtClean="0"/>
               <a:t>Fourth level</a:t>
             </a:r>
           </a:p>
           <a:p>
             <a:pPr lvl="4"/>
             <a:r>
-              <a:rPr lang="en-US"/>
+              <a:rPr lang="en-US" smtClean="0"/>
               <a:t>Fifth level</a:t>
             </a:r>
-            <a:endParaRPr lang="en-US" dirty="0"/>
+            <a:endParaRPr lang="en-IN"/>
           </a:p>
         </p:txBody>
       </p:sp>
@@ -988,7 +833,7 @@
           <a:p>
             <a:fld id="{11A29BAF-3330-497D-9A18-467CD551E181}" type="datetime1">
               <a:rPr lang="en-IN" smtClean="0"/>
-              <a:t>16-07-2026</a:t>
+              <a:t>21-07-2026</a:t>
             </a:fld>
             <a:endParaRPr lang="en-IN"/>
           </a:p>
@@ -1010,9 +855,10 @@
           <a:lstStyle/>
           <a:p>
             <a:r>
-              <a:rPr lang="en-IN"/>
+              <a:rPr lang="en-IN" smtClean="0"/>
               <a:t>Doctoral Progress Committee - I</a:t>
             </a:r>
+            <a:endParaRPr lang="en-IN"/>
           </a:p>
         </p:txBody>
       </p:sp>
@@ -1042,7 +888,7 @@
     </p:spTree>
     <p:extLst>
       <p:ext uri="{BB962C8B-B14F-4D97-AF65-F5344CB8AC3E}">
-        <p14:creationId xmlns:p14="http://schemas.microsoft.com/office/powerpoint/2010/main" val="352135904"/>
+        <p14:creationId xmlns:p14="http://schemas.microsoft.com/office/powerpoint/2010/main" val="2065845040"/>
       </p:ext>
     </p:extLst>
   </p:cSld>
@@ -1071,125 +917,86 @@
       </p:grpSpPr>
       <p:sp>
         <p:nvSpPr>
-          <p:cNvPr id="7" name="Rectangle 6"/>
-          <p:cNvSpPr>
-            <a:spLocks noChangeAspect="1"/>
-          </p:cNvSpPr>
-          <p:nvPr/>
+          <p:cNvPr id="2" name="Vertical Title 1"/>
+          <p:cNvSpPr>
+            <a:spLocks noGrp="1"/>
+          </p:cNvSpPr>
+          <p:nvPr>
+            <p:ph type="title" orient="vert"/>
+          </p:nvPr>
         </p:nvSpPr>
         <p:spPr>
           <a:xfrm>
-            <a:off x="8839201" y="599725"/>
-            <a:ext cx="2906817" cy="5816950"/>
+            <a:off x="11785600" y="274641"/>
+            <a:ext cx="3657600" cy="5851525"/>
           </a:xfrm>
-          <a:prstGeom prst="rect">
-            <a:avLst/>
-          </a:prstGeom>
-          <a:solidFill>
-            <a:schemeClr val="accent1"/>
-          </a:solidFill>
-          <a:ln>
-            <a:noFill/>
-          </a:ln>
-          <a:effectLst/>
         </p:spPr>
-        <p:style>
-          <a:lnRef idx="1">
-            <a:schemeClr val="accent1"/>
-          </a:lnRef>
-          <a:fillRef idx="3">
-            <a:schemeClr val="accent1"/>
-          </a:fillRef>
-          <a:effectRef idx="2">
-            <a:schemeClr val="accent1"/>
-          </a:effectRef>
-          <a:fontRef idx="minor">
-            <a:schemeClr val="lt1"/>
-          </a:fontRef>
-        </p:style>
-      </p:sp>
-      <p:sp>
-        <p:nvSpPr>
-          <p:cNvPr id="2" name="Vertical Title 1"/>
-          <p:cNvSpPr>
-            <a:spLocks noGrp="1"/>
-          </p:cNvSpPr>
-          <p:nvPr>
-            <p:ph type="title" orient="vert"/>
+        <p:txBody>
+          <a:bodyPr vert="eaVert"/>
+          <a:lstStyle/>
+          <a:p>
+            <a:r>
+              <a:rPr lang="en-US" smtClean="0"/>
+              <a:t>Click to edit Master title style</a:t>
+            </a:r>
+            <a:endParaRPr lang="en-IN"/>
+          </a:p>
+        </p:txBody>
+      </p:sp>
+      <p:sp>
+        <p:nvSpPr>
+          <p:cNvPr id="3" name="Vertical Text Placeholder 2"/>
+          <p:cNvSpPr>
+            <a:spLocks noGrp="1"/>
+          </p:cNvSpPr>
+          <p:nvPr>
+            <p:ph type="body" orient="vert" idx="1"/>
           </p:nvPr>
         </p:nvSpPr>
         <p:spPr>
           <a:xfrm>
-            <a:off x="8839201" y="675726"/>
-            <a:ext cx="2004164" cy="5183073"/>
+            <a:off x="812800" y="274641"/>
+            <a:ext cx="10769600" cy="5851525"/>
           </a:xfrm>
         </p:spPr>
         <p:txBody>
           <a:bodyPr vert="eaVert"/>
           <a:lstStyle/>
           <a:p>
-            <a:r>
-              <a:rPr lang="en-US"/>
-              <a:t>Click to edit Master title style</a:t>
-            </a:r>
-            <a:endParaRPr lang="en-US" dirty="0"/>
-          </a:p>
-        </p:txBody>
-      </p:sp>
-      <p:sp>
-        <p:nvSpPr>
-          <p:cNvPr id="3" name="Vertical Text Placeholder 2"/>
-          <p:cNvSpPr>
-            <a:spLocks noGrp="1"/>
-          </p:cNvSpPr>
-          <p:nvPr>
-            <p:ph type="body" orient="vert" idx="1"/>
-          </p:nvPr>
-        </p:nvSpPr>
-        <p:spPr>
-          <a:xfrm>
-            <a:off x="774923" y="675726"/>
-            <a:ext cx="7896279" cy="5183073"/>
-          </a:xfrm>
-        </p:spPr>
-        <p:txBody>
-          <a:bodyPr vert="eaVert" anchor="t"/>
-          <a:lstStyle/>
-          <a:p>
             <a:pPr lvl="0"/>
             <a:r>
-              <a:rPr lang="en-US"/>
+              <a:rPr lang="en-US" smtClean="0"/>
               <a:t>Click to edit Master text styles</a:t>
             </a:r>
           </a:p>
           <a:p>
             <a:pPr lvl="1"/>
             <a:r>
-              <a:rPr lang="en-US"/>
+              <a:rPr lang="en-US" smtClean="0"/>
               <a:t>Second level</a:t>
             </a:r>
           </a:p>
           <a:p>
             <a:pPr lvl="2"/>
             <a:r>
-              <a:rPr lang="en-US"/>
+              <a:rPr lang="en-US" smtClean="0"/>
               <a:t>Third level</a:t>
             </a:r>
           </a:p>
           <a:p>
             <a:pPr lvl="3"/>
             <a:r>
-              <a:rPr lang="en-US"/>
+              <a:rPr lang="en-US" smtClean="0"/>
               <a:t>Fourth level</a:t>
             </a:r>
           </a:p>
           <a:p>
             <a:pPr lvl="4"/>
             <a:r>
-              <a:rPr lang="en-US"/>
+              <a:rPr lang="en-US" smtClean="0"/>
               <a:t>Fifth level</a:t>
             </a:r>
-            <a:endParaRPr lang="en-US" dirty="0"/>
+            <a:endParaRPr lang="en-IN"/>
           </a:p>
         </p:txBody>
       </p:sp>
@@ -1203,30 +1010,14 @@
             <p:ph type="dt" sz="half" idx="10"/>
           </p:nvPr>
         </p:nvSpPr>
-        <p:spPr>
-          <a:xfrm>
-            <a:off x="8993673" y="5956137"/>
-            <a:ext cx="1328141" cy="365125"/>
-          </a:xfrm>
-        </p:spPr>
-        <p:txBody>
-          <a:bodyPr/>
-          <a:lstStyle>
-            <a:lvl1pPr>
-              <a:defRPr>
-                <a:solidFill>
-                  <a:schemeClr val="accent1">
-                    <a:lumMod val="75000"/>
-                    <a:lumOff val="25000"/>
-                  </a:schemeClr>
-                </a:solidFill>
-              </a:defRPr>
-            </a:lvl1pPr>
-          </a:lstStyle>
+        <p:spPr/>
+        <p:txBody>
+          <a:bodyPr/>
+          <a:lstStyle/>
           <a:p>
             <a:fld id="{715E14CF-9B3A-4E1C-8F25-A7ACE2989479}" type="datetime1">
               <a:rPr lang="en-IN" smtClean="0"/>
-              <a:t>16-07-2026</a:t>
+              <a:t>21-07-2026</a:t>
             </a:fld>
             <a:endParaRPr lang="en-IN"/>
           </a:p>
@@ -1242,20 +1033,16 @@
             <p:ph type="ftr" sz="quarter" idx="11"/>
           </p:nvPr>
         </p:nvSpPr>
-        <p:spPr>
-          <a:xfrm>
-            <a:off x="774923" y="5951811"/>
-            <a:ext cx="7896279" cy="365125"/>
-          </a:xfrm>
-        </p:spPr>
-        <p:txBody>
-          <a:bodyPr/>
-          <a:lstStyle/>
-          <a:p>
-            <a:r>
-              <a:rPr lang="en-IN"/>
+        <p:spPr/>
+        <p:txBody>
+          <a:bodyPr/>
+          <a:lstStyle/>
+          <a:p>
+            <a:r>
+              <a:rPr lang="en-IN" smtClean="0"/>
               <a:t>Doctoral Progress Committee - I</a:t>
             </a:r>
+            <a:endParaRPr lang="en-IN"/>
           </a:p>
         </p:txBody>
       </p:sp>
@@ -1269,26 +1056,10 @@
             <p:ph type="sldNum" sz="quarter" idx="12"/>
           </p:nvPr>
         </p:nvSpPr>
-        <p:spPr>
-          <a:xfrm>
-            <a:off x="10446615" y="5956137"/>
-            <a:ext cx="1164195" cy="365125"/>
-          </a:xfrm>
-        </p:spPr>
-        <p:txBody>
-          <a:bodyPr/>
-          <a:lstStyle>
-            <a:lvl1pPr>
-              <a:defRPr>
-                <a:solidFill>
-                  <a:schemeClr val="accent1">
-                    <a:lumMod val="75000"/>
-                    <a:lumOff val="25000"/>
-                  </a:schemeClr>
-                </a:solidFill>
-              </a:defRPr>
-            </a:lvl1pPr>
-          </a:lstStyle>
+        <p:spPr/>
+        <p:txBody>
+          <a:bodyPr/>
+          <a:lstStyle/>
           <a:p>
             <a:fld id="{8D1C8765-CB22-4976-8758-5A372A2DCF34}" type="slidenum">
               <a:rPr lang="en-IN" smtClean="0"/>
@@ -1301,7 +1072,7 @@
     </p:spTree>
     <p:extLst>
       <p:ext uri="{BB962C8B-B14F-4D97-AF65-F5344CB8AC3E}">
-        <p14:creationId xmlns:p14="http://schemas.microsoft.com/office/powerpoint/2010/main" val="193170399"/>
+        <p14:creationId xmlns:p14="http://schemas.microsoft.com/office/powerpoint/2010/main" val="3108162342"/>
       </p:ext>
     </p:extLst>
   </p:cSld>
@@ -1330,45 +1101,6 @@
       </p:grpSpPr>
       <p:sp>
         <p:nvSpPr>
-          <p:cNvPr id="7" name="Rectangle 6"/>
-          <p:cNvSpPr>
-            <a:spLocks noChangeAspect="1"/>
-          </p:cNvSpPr>
-          <p:nvPr/>
-        </p:nvSpPr>
-        <p:spPr>
-          <a:xfrm>
-            <a:off x="440286" y="614407"/>
-            <a:ext cx="11309338" cy="1189298"/>
-          </a:xfrm>
-          <a:prstGeom prst="rect">
-            <a:avLst/>
-          </a:prstGeom>
-          <a:solidFill>
-            <a:schemeClr val="accent1"/>
-          </a:solidFill>
-          <a:ln>
-            <a:noFill/>
-          </a:ln>
-          <a:effectLst/>
-        </p:spPr>
-        <p:style>
-          <a:lnRef idx="1">
-            <a:schemeClr val="accent1"/>
-          </a:lnRef>
-          <a:fillRef idx="3">
-            <a:schemeClr val="accent1"/>
-          </a:fillRef>
-          <a:effectRef idx="2">
-            <a:schemeClr val="accent1"/>
-          </a:effectRef>
-          <a:fontRef idx="minor">
-            <a:schemeClr val="lt1"/>
-          </a:fontRef>
-        </p:style>
-      </p:sp>
-      <p:sp>
-        <p:nvSpPr>
           <p:cNvPr id="2" name="Title 1"/>
           <p:cNvSpPr>
             <a:spLocks noGrp="1"/>
@@ -1377,21 +1109,16 @@
             <p:ph type="title"/>
           </p:nvPr>
         </p:nvSpPr>
-        <p:spPr>
-          <a:xfrm>
-            <a:off x="581192" y="702156"/>
-            <a:ext cx="11029616" cy="1013800"/>
-          </a:xfrm>
-        </p:spPr>
-        <p:txBody>
-          <a:bodyPr/>
-          <a:lstStyle/>
-          <a:p>
-            <a:r>
-              <a:rPr lang="en-US"/>
+        <p:spPr/>
+        <p:txBody>
+          <a:bodyPr/>
+          <a:lstStyle/>
+          <a:p>
+            <a:r>
+              <a:rPr lang="en-US" smtClean="0"/>
               <a:t>Click to edit Master title style</a:t>
             </a:r>
-            <a:endParaRPr lang="en-US" dirty="0"/>
+            <a:endParaRPr lang="en-IN"/>
           </a:p>
         </p:txBody>
       </p:sp>
@@ -1405,50 +1132,45 @@
             <p:ph idx="1"/>
           </p:nvPr>
         </p:nvSpPr>
-        <p:spPr>
-          <a:xfrm>
-            <a:off x="581192" y="2180496"/>
-            <a:ext cx="11029615" cy="3678303"/>
-          </a:xfrm>
-        </p:spPr>
+        <p:spPr/>
         <p:txBody>
           <a:bodyPr/>
           <a:lstStyle/>
           <a:p>
             <a:pPr lvl="0"/>
             <a:r>
-              <a:rPr lang="en-US"/>
+              <a:rPr lang="en-US" smtClean="0"/>
               <a:t>Click to edit Master text styles</a:t>
             </a:r>
           </a:p>
           <a:p>
             <a:pPr lvl="1"/>
             <a:r>
-              <a:rPr lang="en-US"/>
+              <a:rPr lang="en-US" smtClean="0"/>
               <a:t>Second level</a:t>
             </a:r>
           </a:p>
           <a:p>
             <a:pPr lvl="2"/>
             <a:r>
-              <a:rPr lang="en-US"/>
+              <a:rPr lang="en-US" smtClean="0"/>
               <a:t>Third level</a:t>
             </a:r>
           </a:p>
           <a:p>
             <a:pPr lvl="3"/>
             <a:r>
-              <a:rPr lang="en-US"/>
+              <a:rPr lang="en-US" smtClean="0"/>
               <a:t>Fourth level</a:t>
             </a:r>
           </a:p>
           <a:p>
             <a:pPr lvl="4"/>
             <a:r>
-              <a:rPr lang="en-US"/>
+              <a:rPr lang="en-US" smtClean="0"/>
               <a:t>Fifth level</a:t>
             </a:r>
-            <a:endParaRPr lang="en-US" dirty="0"/>
+            <a:endParaRPr lang="en-IN"/>
           </a:p>
         </p:txBody>
       </p:sp>
@@ -1469,7 +1191,7 @@
           <a:p>
             <a:fld id="{8A5E92CE-0999-4EB6-9368-8C73B1F16242}" type="datetime1">
               <a:rPr lang="en-IN" smtClean="0"/>
-              <a:t>16-07-2026</a:t>
+              <a:t>21-07-2026</a:t>
             </a:fld>
             <a:endParaRPr lang="en-IN"/>
           </a:p>
@@ -1491,9 +1213,10 @@
           <a:lstStyle/>
           <a:p>
             <a:r>
-              <a:rPr lang="en-IN"/>
+              <a:rPr lang="en-IN" smtClean="0"/>
               <a:t>Doctoral Progress Committee - I</a:t>
             </a:r>
+            <a:endParaRPr lang="en-IN"/>
           </a:p>
         </p:txBody>
       </p:sp>
@@ -1507,12 +1230,7 @@
             <p:ph type="sldNum" sz="quarter" idx="12"/>
           </p:nvPr>
         </p:nvSpPr>
-        <p:spPr>
-          <a:xfrm>
-            <a:off x="10558300" y="5956137"/>
-            <a:ext cx="1052508" cy="365125"/>
-          </a:xfrm>
-        </p:spPr>
+        <p:spPr/>
         <p:txBody>
           <a:bodyPr/>
           <a:lstStyle/>
@@ -1528,7 +1246,7 @@
     </p:spTree>
     <p:extLst>
       <p:ext uri="{BB962C8B-B14F-4D97-AF65-F5344CB8AC3E}">
-        <p14:creationId xmlns:p14="http://schemas.microsoft.com/office/powerpoint/2010/main" val="230079039"/>
+        <p14:creationId xmlns:p14="http://schemas.microsoft.com/office/powerpoint/2010/main" val="2146345015"/>
       </p:ext>
     </p:extLst>
   </p:cSld>
@@ -1557,107 +1275,62 @@
       </p:grpSpPr>
       <p:sp>
         <p:nvSpPr>
-          <p:cNvPr id="8" name="Rectangle 7"/>
-          <p:cNvSpPr>
-            <a:spLocks noChangeAspect="1"/>
-          </p:cNvSpPr>
-          <p:nvPr/>
+          <p:cNvPr id="2" name="Title 1"/>
+          <p:cNvSpPr>
+            <a:spLocks noGrp="1"/>
+          </p:cNvSpPr>
+          <p:nvPr>
+            <p:ph type="title"/>
+          </p:nvPr>
         </p:nvSpPr>
         <p:spPr>
           <a:xfrm>
-            <a:off x="447817" y="5141974"/>
-            <a:ext cx="11290860" cy="1258827"/>
+            <a:off x="963084" y="4406903"/>
+            <a:ext cx="10363200" cy="1362075"/>
           </a:xfrm>
-          <a:prstGeom prst="rect">
-            <a:avLst/>
-          </a:prstGeom>
-          <a:solidFill>
-            <a:schemeClr val="accent1"/>
-          </a:solidFill>
-          <a:ln>
-            <a:noFill/>
-          </a:ln>
-          <a:effectLst/>
         </p:spPr>
-        <p:style>
-          <a:lnRef idx="1">
-            <a:schemeClr val="accent1"/>
-          </a:lnRef>
-          <a:fillRef idx="3">
-            <a:schemeClr val="accent1"/>
-          </a:fillRef>
-          <a:effectRef idx="2">
-            <a:schemeClr val="accent1"/>
-          </a:effectRef>
-          <a:fontRef idx="minor">
-            <a:schemeClr val="lt1"/>
-          </a:fontRef>
-        </p:style>
-      </p:sp>
-      <p:sp>
-        <p:nvSpPr>
-          <p:cNvPr id="2" name="Title 1"/>
-          <p:cNvSpPr>
-            <a:spLocks noGrp="1"/>
-          </p:cNvSpPr>
-          <p:nvPr>
-            <p:ph type="title"/>
+        <p:txBody>
+          <a:bodyPr anchor="t"/>
+          <a:lstStyle>
+            <a:lvl1pPr algn="l">
+              <a:defRPr sz="4000" b="1" cap="all"/>
+            </a:lvl1pPr>
+          </a:lstStyle>
+          <a:p>
+            <a:r>
+              <a:rPr lang="en-US" smtClean="0"/>
+              <a:t>Click to edit Master title style</a:t>
+            </a:r>
+            <a:endParaRPr lang="en-IN"/>
+          </a:p>
+        </p:txBody>
+      </p:sp>
+      <p:sp>
+        <p:nvSpPr>
+          <p:cNvPr id="3" name="Text Placeholder 2"/>
+          <p:cNvSpPr>
+            <a:spLocks noGrp="1"/>
+          </p:cNvSpPr>
+          <p:nvPr>
+            <p:ph type="body" idx="1"/>
           </p:nvPr>
         </p:nvSpPr>
         <p:spPr>
           <a:xfrm>
-            <a:off x="581193" y="3043910"/>
-            <a:ext cx="11029615" cy="1497507"/>
+            <a:off x="963084" y="2906713"/>
+            <a:ext cx="10363200" cy="1500187"/>
           </a:xfrm>
         </p:spPr>
         <p:txBody>
-          <a:bodyPr anchor="b">
-            <a:normAutofit/>
-          </a:bodyPr>
+          <a:bodyPr anchor="b"/>
           <a:lstStyle>
-            <a:lvl1pPr algn="l">
-              <a:defRPr sz="3600" b="0" cap="all">
+            <a:lvl1pPr marL="0" indent="0">
+              <a:buNone/>
+              <a:defRPr sz="2000">
                 <a:solidFill>
-                  <a:schemeClr val="accent1"/>
-                </a:solidFill>
-              </a:defRPr>
-            </a:lvl1pPr>
-          </a:lstStyle>
-          <a:p>
-            <a:r>
-              <a:rPr lang="en-US"/>
-              <a:t>Click to edit Master title style</a:t>
-            </a:r>
-            <a:endParaRPr lang="en-US" dirty="0"/>
-          </a:p>
-        </p:txBody>
-      </p:sp>
-      <p:sp>
-        <p:nvSpPr>
-          <p:cNvPr id="3" name="Text Placeholder 2"/>
-          <p:cNvSpPr>
-            <a:spLocks noGrp="1"/>
-          </p:cNvSpPr>
-          <p:nvPr>
-            <p:ph type="body" idx="1"/>
-          </p:nvPr>
-        </p:nvSpPr>
-        <p:spPr>
-          <a:xfrm>
-            <a:off x="581192" y="4541417"/>
-            <a:ext cx="11029615" cy="600556"/>
-          </a:xfrm>
-        </p:spPr>
-        <p:txBody>
-          <a:bodyPr anchor="t">
-            <a:normAutofit/>
-          </a:bodyPr>
-          <a:lstStyle>
-            <a:lvl1pPr marL="0" indent="0" algn="l">
-              <a:buNone/>
-              <a:defRPr sz="1800" cap="all">
-                <a:solidFill>
-                  <a:schemeClr val="accent2"/>
+                  <a:schemeClr val="tx1">
+                    <a:tint val="75000"/>
+                  </a:schemeClr>
                 </a:solidFill>
               </a:defRPr>
             </a:lvl1pPr>
@@ -1745,7 +1418,7 @@
           <a:p>
             <a:pPr lvl="0"/>
             <a:r>
-              <a:rPr lang="en-US"/>
+              <a:rPr lang="en-US" smtClean="0"/>
               <a:t>Click to edit Master text styles</a:t>
             </a:r>
           </a:p>
@@ -1764,22 +1437,11 @@
         <p:spPr/>
         <p:txBody>
           <a:bodyPr/>
-          <a:lstStyle>
-            <a:lvl1pPr>
-              <a:defRPr>
-                <a:solidFill>
-                  <a:schemeClr val="accent1">
-                    <a:lumMod val="75000"/>
-                    <a:lumOff val="25000"/>
-                  </a:schemeClr>
-                </a:solidFill>
-              </a:defRPr>
-            </a:lvl1pPr>
-          </a:lstStyle>
+          <a:lstStyle/>
           <a:p>
             <a:fld id="{1B6B4E4E-8D3E-4CE4-9245-5C46B72C63D5}" type="datetime1">
               <a:rPr lang="en-IN" smtClean="0"/>
-              <a:t>16-07-2026</a:t>
+              <a:t>21-07-2026</a:t>
             </a:fld>
             <a:endParaRPr lang="en-IN"/>
           </a:p>
@@ -1798,23 +1460,13 @@
         <p:spPr/>
         <p:txBody>
           <a:bodyPr/>
-          <a:lstStyle>
-            <a:lvl1pPr>
-              <a:defRPr>
-                <a:solidFill>
-                  <a:schemeClr val="accent1">
-                    <a:lumMod val="75000"/>
-                    <a:lumOff val="25000"/>
-                  </a:schemeClr>
-                </a:solidFill>
-              </a:defRPr>
-            </a:lvl1pPr>
-          </a:lstStyle>
-          <a:p>
-            <a:r>
-              <a:rPr lang="en-IN"/>
+          <a:lstStyle/>
+          <a:p>
+            <a:r>
+              <a:rPr lang="en-IN" smtClean="0"/>
               <a:t>Doctoral Progress Committee - I</a:t>
             </a:r>
+            <a:endParaRPr lang="en-IN"/>
           </a:p>
         </p:txBody>
       </p:sp>
@@ -1831,18 +1483,7 @@
         <p:spPr/>
         <p:txBody>
           <a:bodyPr/>
-          <a:lstStyle>
-            <a:lvl1pPr>
-              <a:defRPr>
-                <a:solidFill>
-                  <a:schemeClr val="accent1">
-                    <a:lumMod val="75000"/>
-                    <a:lumOff val="25000"/>
-                  </a:schemeClr>
-                </a:solidFill>
-              </a:defRPr>
-            </a:lvl1pPr>
-          </a:lstStyle>
+          <a:lstStyle/>
           <a:p>
             <a:fld id="{8D1C8765-CB22-4976-8758-5A372A2DCF34}" type="slidenum">
               <a:rPr lang="en-IN" smtClean="0"/>
@@ -1855,7 +1496,7 @@
     </p:spTree>
     <p:extLst>
       <p:ext uri="{BB962C8B-B14F-4D97-AF65-F5344CB8AC3E}">
-        <p14:creationId xmlns:p14="http://schemas.microsoft.com/office/powerpoint/2010/main" val="4122169934"/>
+        <p14:creationId xmlns:p14="http://schemas.microsoft.com/office/powerpoint/2010/main" val="1950839106"/>
       </p:ext>
     </p:extLst>
   </p:cSld>
@@ -1884,186 +1525,194 @@
       </p:grpSpPr>
       <p:sp>
         <p:nvSpPr>
-          <p:cNvPr id="8" name="Rectangle 7"/>
-          <p:cNvSpPr>
-            <a:spLocks noChangeAspect="1"/>
-          </p:cNvSpPr>
-          <p:nvPr/>
+          <p:cNvPr id="2" name="Title 1"/>
+          <p:cNvSpPr>
+            <a:spLocks noGrp="1"/>
+          </p:cNvSpPr>
+          <p:nvPr>
+            <p:ph type="title"/>
+          </p:nvPr>
+        </p:nvSpPr>
+        <p:spPr/>
+        <p:txBody>
+          <a:bodyPr/>
+          <a:lstStyle/>
+          <a:p>
+            <a:r>
+              <a:rPr lang="en-US" smtClean="0"/>
+              <a:t>Click to edit Master title style</a:t>
+            </a:r>
+            <a:endParaRPr lang="en-IN"/>
+          </a:p>
+        </p:txBody>
+      </p:sp>
+      <p:sp>
+        <p:nvSpPr>
+          <p:cNvPr id="3" name="Content Placeholder 2"/>
+          <p:cNvSpPr>
+            <a:spLocks noGrp="1"/>
+          </p:cNvSpPr>
+          <p:nvPr>
+            <p:ph sz="half" idx="1"/>
+          </p:nvPr>
         </p:nvSpPr>
         <p:spPr>
           <a:xfrm>
-            <a:off x="445982" y="606554"/>
-            <a:ext cx="11300036" cy="1258827"/>
+            <a:off x="812800" y="1600203"/>
+            <a:ext cx="7213600" cy="4525963"/>
           </a:xfrm>
-          <a:prstGeom prst="rect">
-            <a:avLst/>
-          </a:prstGeom>
-          <a:solidFill>
-            <a:schemeClr val="accent1"/>
-          </a:solidFill>
-          <a:ln>
-            <a:noFill/>
-          </a:ln>
-          <a:effectLst/>
         </p:spPr>
-        <p:style>
-          <a:lnRef idx="1">
-            <a:schemeClr val="accent1"/>
-          </a:lnRef>
-          <a:fillRef idx="3">
-            <a:schemeClr val="accent1"/>
-          </a:fillRef>
-          <a:effectRef idx="2">
-            <a:schemeClr val="accent1"/>
-          </a:effectRef>
-          <a:fontRef idx="minor">
-            <a:schemeClr val="lt1"/>
-          </a:fontRef>
-        </p:style>
-      </p:sp>
-      <p:sp>
-        <p:nvSpPr>
-          <p:cNvPr id="2" name="Title 1"/>
-          <p:cNvSpPr>
-            <a:spLocks noGrp="1"/>
-          </p:cNvSpPr>
-          <p:nvPr>
-            <p:ph type="title"/>
+        <p:txBody>
+          <a:bodyPr/>
+          <a:lstStyle>
+            <a:lvl1pPr>
+              <a:defRPr sz="2800"/>
+            </a:lvl1pPr>
+            <a:lvl2pPr>
+              <a:defRPr sz="2400"/>
+            </a:lvl2pPr>
+            <a:lvl3pPr>
+              <a:defRPr sz="2000"/>
+            </a:lvl3pPr>
+            <a:lvl4pPr>
+              <a:defRPr sz="1800"/>
+            </a:lvl4pPr>
+            <a:lvl5pPr>
+              <a:defRPr sz="1800"/>
+            </a:lvl5pPr>
+            <a:lvl6pPr>
+              <a:defRPr sz="1800"/>
+            </a:lvl6pPr>
+            <a:lvl7pPr>
+              <a:defRPr sz="1800"/>
+            </a:lvl7pPr>
+            <a:lvl8pPr>
+              <a:defRPr sz="1800"/>
+            </a:lvl8pPr>
+            <a:lvl9pPr>
+              <a:defRPr sz="1800"/>
+            </a:lvl9pPr>
+          </a:lstStyle>
+          <a:p>
+            <a:pPr lvl="0"/>
+            <a:r>
+              <a:rPr lang="en-US" smtClean="0"/>
+              <a:t>Click to edit Master text styles</a:t>
+            </a:r>
+          </a:p>
+          <a:p>
+            <a:pPr lvl="1"/>
+            <a:r>
+              <a:rPr lang="en-US" smtClean="0"/>
+              <a:t>Second level</a:t>
+            </a:r>
+          </a:p>
+          <a:p>
+            <a:pPr lvl="2"/>
+            <a:r>
+              <a:rPr lang="en-US" smtClean="0"/>
+              <a:t>Third level</a:t>
+            </a:r>
+          </a:p>
+          <a:p>
+            <a:pPr lvl="3"/>
+            <a:r>
+              <a:rPr lang="en-US" smtClean="0"/>
+              <a:t>Fourth level</a:t>
+            </a:r>
+          </a:p>
+          <a:p>
+            <a:pPr lvl="4"/>
+            <a:r>
+              <a:rPr lang="en-US" smtClean="0"/>
+              <a:t>Fifth level</a:t>
+            </a:r>
+            <a:endParaRPr lang="en-IN"/>
+          </a:p>
+        </p:txBody>
+      </p:sp>
+      <p:sp>
+        <p:nvSpPr>
+          <p:cNvPr id="4" name="Content Placeholder 3"/>
+          <p:cNvSpPr>
+            <a:spLocks noGrp="1"/>
+          </p:cNvSpPr>
+          <p:nvPr>
+            <p:ph sz="half" idx="2"/>
           </p:nvPr>
         </p:nvSpPr>
         <p:spPr>
           <a:xfrm>
-            <a:off x="581193" y="729658"/>
-            <a:ext cx="11029616" cy="988332"/>
+            <a:off x="8229600" y="1600203"/>
+            <a:ext cx="7213600" cy="4525963"/>
           </a:xfrm>
         </p:spPr>
         <p:txBody>
           <a:bodyPr/>
-          <a:lstStyle/>
-          <a:p>
-            <a:r>
-              <a:rPr lang="en-US"/>
-              <a:t>Click to edit Master title style</a:t>
-            </a:r>
-            <a:endParaRPr lang="en-US" dirty="0"/>
-          </a:p>
-        </p:txBody>
-      </p:sp>
-      <p:sp>
-        <p:nvSpPr>
-          <p:cNvPr id="3" name="Content Placeholder 2"/>
-          <p:cNvSpPr>
-            <a:spLocks noGrp="1"/>
-          </p:cNvSpPr>
-          <p:nvPr>
-            <p:ph sz="half" idx="1"/>
-          </p:nvPr>
-        </p:nvSpPr>
-        <p:spPr>
-          <a:xfrm>
-            <a:off x="581193" y="2228003"/>
-            <a:ext cx="5422390" cy="3633047"/>
-          </a:xfrm>
-        </p:spPr>
-        <p:txBody>
-          <a:bodyPr>
-            <a:normAutofit/>
-          </a:bodyPr>
-          <a:lstStyle/>
+          <a:lstStyle>
+            <a:lvl1pPr>
+              <a:defRPr sz="2800"/>
+            </a:lvl1pPr>
+            <a:lvl2pPr>
+              <a:defRPr sz="2400"/>
+            </a:lvl2pPr>
+            <a:lvl3pPr>
+              <a:defRPr sz="2000"/>
+            </a:lvl3pPr>
+            <a:lvl4pPr>
+              <a:defRPr sz="1800"/>
+            </a:lvl4pPr>
+            <a:lvl5pPr>
+              <a:defRPr sz="1800"/>
+            </a:lvl5pPr>
+            <a:lvl6pPr>
+              <a:defRPr sz="1800"/>
+            </a:lvl6pPr>
+            <a:lvl7pPr>
+              <a:defRPr sz="1800"/>
+            </a:lvl7pPr>
+            <a:lvl8pPr>
+              <a:defRPr sz="1800"/>
+            </a:lvl8pPr>
+            <a:lvl9pPr>
+              <a:defRPr sz="1800"/>
+            </a:lvl9pPr>
+          </a:lstStyle>
           <a:p>
             <a:pPr lvl="0"/>
             <a:r>
-              <a:rPr lang="en-US"/>
+              <a:rPr lang="en-US" smtClean="0"/>
               <a:t>Click to edit Master text styles</a:t>
             </a:r>
           </a:p>
           <a:p>
             <a:pPr lvl="1"/>
             <a:r>
-              <a:rPr lang="en-US"/>
+              <a:rPr lang="en-US" smtClean="0"/>
               <a:t>Second level</a:t>
             </a:r>
           </a:p>
           <a:p>
             <a:pPr lvl="2"/>
             <a:r>
-              <a:rPr lang="en-US"/>
+              <a:rPr lang="en-US" smtClean="0"/>
               <a:t>Third level</a:t>
             </a:r>
           </a:p>
           <a:p>
             <a:pPr lvl="3"/>
             <a:r>
-              <a:rPr lang="en-US"/>
+              <a:rPr lang="en-US" smtClean="0"/>
               <a:t>Fourth level</a:t>
             </a:r>
           </a:p>
           <a:p>
             <a:pPr lvl="4"/>
             <a:r>
-              <a:rPr lang="en-US"/>
+              <a:rPr lang="en-US" smtClean="0"/>
               <a:t>Fifth level</a:t>
             </a:r>
-            <a:endParaRPr lang="en-US" dirty="0"/>
-          </a:p>
-        </p:txBody>
-      </p:sp>
-      <p:sp>
-        <p:nvSpPr>
-          <p:cNvPr id="4" name="Content Placeholder 3"/>
-          <p:cNvSpPr>
-            <a:spLocks noGrp="1"/>
-          </p:cNvSpPr>
-          <p:nvPr>
-            <p:ph sz="half" idx="2"/>
-          </p:nvPr>
-        </p:nvSpPr>
-        <p:spPr>
-          <a:xfrm>
-            <a:off x="6188417" y="2228003"/>
-            <a:ext cx="5422392" cy="3633047"/>
-          </a:xfrm>
-        </p:spPr>
-        <p:txBody>
-          <a:bodyPr>
-            <a:normAutofit/>
-          </a:bodyPr>
-          <a:lstStyle/>
-          <a:p>
-            <a:pPr lvl="0"/>
-            <a:r>
-              <a:rPr lang="en-US"/>
-              <a:t>Click to edit Master text styles</a:t>
-            </a:r>
-          </a:p>
-          <a:p>
-            <a:pPr lvl="1"/>
-            <a:r>
-              <a:rPr lang="en-US"/>
-              <a:t>Second level</a:t>
-            </a:r>
-          </a:p>
-          <a:p>
-            <a:pPr lvl="2"/>
-            <a:r>
-              <a:rPr lang="en-US"/>
-              <a:t>Third level</a:t>
-            </a:r>
-          </a:p>
-          <a:p>
-            <a:pPr lvl="3"/>
-            <a:r>
-              <a:rPr lang="en-US"/>
-              <a:t>Fourth level</a:t>
-            </a:r>
-          </a:p>
-          <a:p>
-            <a:pPr lvl="4"/>
-            <a:r>
-              <a:rPr lang="en-US"/>
-              <a:t>Fifth level</a:t>
-            </a:r>
-            <a:endParaRPr lang="en-US" dirty="0"/>
+            <a:endParaRPr lang="en-IN"/>
           </a:p>
         </p:txBody>
       </p:sp>
@@ -2084,7 +1733,7 @@
           <a:p>
             <a:fld id="{5086C013-9419-482C-A4C0-4A69182A78B7}" type="datetime1">
               <a:rPr lang="en-IN" smtClean="0"/>
-              <a:t>16-07-2026</a:t>
+              <a:t>21-07-2026</a:t>
             </a:fld>
             <a:endParaRPr lang="en-IN"/>
           </a:p>
@@ -2106,9 +1755,10 @@
           <a:lstStyle/>
           <a:p>
             <a:r>
-              <a:rPr lang="en-IN"/>
+              <a:rPr lang="en-IN" smtClean="0"/>
               <a:t>Doctoral Progress Committee - I</a:t>
             </a:r>
+            <a:endParaRPr lang="en-IN"/>
           </a:p>
         </p:txBody>
       </p:sp>
@@ -2138,7 +1788,7 @@
     </p:spTree>
     <p:extLst>
       <p:ext uri="{BB962C8B-B14F-4D97-AF65-F5344CB8AC3E}">
-        <p14:creationId xmlns:p14="http://schemas.microsoft.com/office/powerpoint/2010/main" val="2306989142"/>
+        <p14:creationId xmlns:p14="http://schemas.microsoft.com/office/powerpoint/2010/main" val="4079847231"/>
       </p:ext>
     </p:extLst>
   </p:cSld>
@@ -2167,99 +1817,58 @@
       </p:grpSpPr>
       <p:sp>
         <p:nvSpPr>
-          <p:cNvPr id="11" name="Rectangle 10"/>
-          <p:cNvSpPr>
-            <a:spLocks noChangeAspect="1"/>
-          </p:cNvSpPr>
-          <p:nvPr/>
+          <p:cNvPr id="2" name="Title 1"/>
+          <p:cNvSpPr>
+            <a:spLocks noGrp="1"/>
+          </p:cNvSpPr>
+          <p:nvPr>
+            <p:ph type="title"/>
+          </p:nvPr>
         </p:nvSpPr>
         <p:spPr>
           <a:xfrm>
-            <a:off x="445982" y="606554"/>
-            <a:ext cx="11300036" cy="1258827"/>
+            <a:off x="609600" y="274638"/>
+            <a:ext cx="10972800" cy="1143000"/>
           </a:xfrm>
-          <a:prstGeom prst="rect">
-            <a:avLst/>
-          </a:prstGeom>
-          <a:solidFill>
-            <a:schemeClr val="accent1"/>
-          </a:solidFill>
-          <a:ln>
-            <a:noFill/>
-          </a:ln>
-          <a:effectLst/>
         </p:spPr>
-        <p:style>
-          <a:lnRef idx="1">
-            <a:schemeClr val="accent1"/>
-          </a:lnRef>
-          <a:fillRef idx="3">
-            <a:schemeClr val="accent1"/>
-          </a:fillRef>
-          <a:effectRef idx="2">
-            <a:schemeClr val="accent1"/>
-          </a:effectRef>
-          <a:fontRef idx="minor">
-            <a:schemeClr val="lt1"/>
-          </a:fontRef>
-        </p:style>
-      </p:sp>
-      <p:sp>
-        <p:nvSpPr>
-          <p:cNvPr id="12" name="Title 1"/>
-          <p:cNvSpPr>
-            <a:spLocks noGrp="1"/>
-          </p:cNvSpPr>
-          <p:nvPr>
-            <p:ph type="title"/>
+        <p:txBody>
+          <a:bodyPr/>
+          <a:lstStyle>
+            <a:lvl1pPr>
+              <a:defRPr/>
+            </a:lvl1pPr>
+          </a:lstStyle>
+          <a:p>
+            <a:r>
+              <a:rPr lang="en-US" smtClean="0"/>
+              <a:t>Click to edit Master title style</a:t>
+            </a:r>
+            <a:endParaRPr lang="en-IN"/>
+          </a:p>
+        </p:txBody>
+      </p:sp>
+      <p:sp>
+        <p:nvSpPr>
+          <p:cNvPr id="3" name="Text Placeholder 2"/>
+          <p:cNvSpPr>
+            <a:spLocks noGrp="1"/>
+          </p:cNvSpPr>
+          <p:nvPr>
+            <p:ph type="body" idx="1"/>
           </p:nvPr>
         </p:nvSpPr>
         <p:spPr>
           <a:xfrm>
-            <a:off x="581193" y="729658"/>
-            <a:ext cx="11029616" cy="988332"/>
+            <a:off x="609600" y="1535113"/>
+            <a:ext cx="5386917" cy="639762"/>
           </a:xfrm>
         </p:spPr>
         <p:txBody>
-          <a:bodyPr/>
-          <a:lstStyle/>
-          <a:p>
-            <a:r>
-              <a:rPr lang="en-US"/>
-              <a:t>Click to edit Master title style</a:t>
-            </a:r>
-            <a:endParaRPr lang="en-US" dirty="0"/>
-          </a:p>
-        </p:txBody>
-      </p:sp>
-      <p:sp>
-        <p:nvSpPr>
-          <p:cNvPr id="3" name="Text Placeholder 2"/>
-          <p:cNvSpPr>
-            <a:spLocks noGrp="1"/>
-          </p:cNvSpPr>
-          <p:nvPr>
-            <p:ph type="body" idx="1"/>
-          </p:nvPr>
-        </p:nvSpPr>
-        <p:spPr>
-          <a:xfrm>
-            <a:off x="887219" y="2250892"/>
-            <a:ext cx="5087075" cy="536005"/>
-          </a:xfrm>
-        </p:spPr>
-        <p:txBody>
-          <a:bodyPr anchor="b">
-            <a:noAutofit/>
-          </a:bodyPr>
+          <a:bodyPr anchor="b"/>
           <a:lstStyle>
             <a:lvl1pPr marL="0" indent="0">
               <a:buNone/>
-              <a:defRPr sz="2200" b="0">
-                <a:solidFill>
-                  <a:schemeClr val="accent2"/>
-                </a:solidFill>
-              </a:defRPr>
+              <a:defRPr sz="2400" b="1"/>
             </a:lvl1pPr>
             <a:lvl2pPr marL="457200" indent="0">
               <a:buNone/>
@@ -2297,7 +1906,7 @@
           <a:p>
             <a:pPr lvl="0"/>
             <a:r>
-              <a:rPr lang="en-US"/>
+              <a:rPr lang="en-US" smtClean="0"/>
               <a:t>Click to edit Master text styles</a:t>
             </a:r>
           </a:p>
@@ -2315,50 +1924,76 @@
         </p:nvSpPr>
         <p:spPr>
           <a:xfrm>
-            <a:off x="581194" y="2926052"/>
-            <a:ext cx="5393100" cy="2934999"/>
+            <a:off x="609600" y="2174875"/>
+            <a:ext cx="5386917" cy="3951288"/>
           </a:xfrm>
         </p:spPr>
         <p:txBody>
-          <a:bodyPr anchor="t">
-            <a:normAutofit/>
-          </a:bodyPr>
-          <a:lstStyle/>
+          <a:bodyPr/>
+          <a:lstStyle>
+            <a:lvl1pPr>
+              <a:defRPr sz="2400"/>
+            </a:lvl1pPr>
+            <a:lvl2pPr>
+              <a:defRPr sz="2000"/>
+            </a:lvl2pPr>
+            <a:lvl3pPr>
+              <a:defRPr sz="1800"/>
+            </a:lvl3pPr>
+            <a:lvl4pPr>
+              <a:defRPr sz="1600"/>
+            </a:lvl4pPr>
+            <a:lvl5pPr>
+              <a:defRPr sz="1600"/>
+            </a:lvl5pPr>
+            <a:lvl6pPr>
+              <a:defRPr sz="1600"/>
+            </a:lvl6pPr>
+            <a:lvl7pPr>
+              <a:defRPr sz="1600"/>
+            </a:lvl7pPr>
+            <a:lvl8pPr>
+              <a:defRPr sz="1600"/>
+            </a:lvl8pPr>
+            <a:lvl9pPr>
+              <a:defRPr sz="1600"/>
+            </a:lvl9pPr>
+          </a:lstStyle>
           <a:p>
             <a:pPr lvl="0"/>
             <a:r>
-              <a:rPr lang="en-US"/>
+              <a:rPr lang="en-US" smtClean="0"/>
               <a:t>Click to edit Master text styles</a:t>
             </a:r>
           </a:p>
           <a:p>
             <a:pPr lvl="1"/>
             <a:r>
-              <a:rPr lang="en-US"/>
+              <a:rPr lang="en-US" smtClean="0"/>
               <a:t>Second level</a:t>
             </a:r>
           </a:p>
           <a:p>
             <a:pPr lvl="2"/>
             <a:r>
-              <a:rPr lang="en-US"/>
+              <a:rPr lang="en-US" smtClean="0"/>
               <a:t>Third level</a:t>
             </a:r>
           </a:p>
           <a:p>
             <a:pPr lvl="3"/>
             <a:r>
-              <a:rPr lang="en-US"/>
+              <a:rPr lang="en-US" smtClean="0"/>
               <a:t>Fourth level</a:t>
             </a:r>
           </a:p>
           <a:p>
             <a:pPr lvl="4"/>
             <a:r>
-              <a:rPr lang="en-US"/>
+              <a:rPr lang="en-US" smtClean="0"/>
               <a:t>Fifth level</a:t>
             </a:r>
-            <a:endParaRPr lang="en-US" dirty="0"/>
+            <a:endParaRPr lang="en-IN"/>
           </a:p>
         </p:txBody>
       </p:sp>
@@ -2374,22 +2009,16 @@
         </p:nvSpPr>
         <p:spPr>
           <a:xfrm>
-            <a:off x="6523735" y="2250892"/>
-            <a:ext cx="5087073" cy="553373"/>
+            <a:off x="6193369" y="1535113"/>
+            <a:ext cx="5389033" cy="639762"/>
           </a:xfrm>
         </p:spPr>
         <p:txBody>
-          <a:bodyPr anchor="b">
-            <a:noAutofit/>
-          </a:bodyPr>
+          <a:bodyPr anchor="b"/>
           <a:lstStyle>
             <a:lvl1pPr marL="0" indent="0">
               <a:buNone/>
-              <a:defRPr sz="2200" b="0">
-                <a:solidFill>
-                  <a:schemeClr val="accent2"/>
-                </a:solidFill>
-              </a:defRPr>
+              <a:defRPr sz="2400" b="1"/>
             </a:lvl1pPr>
             <a:lvl2pPr marL="457200" indent="0">
               <a:buNone/>
@@ -2427,7 +2056,7 @@
           <a:p>
             <a:pPr lvl="0"/>
             <a:r>
-              <a:rPr lang="en-US"/>
+              <a:rPr lang="en-US" smtClean="0"/>
               <a:t>Click to edit Master text styles</a:t>
             </a:r>
           </a:p>
@@ -2445,50 +2074,76 @@
         </p:nvSpPr>
         <p:spPr>
           <a:xfrm>
-            <a:off x="6217709" y="2926052"/>
-            <a:ext cx="5393100" cy="2934999"/>
+            <a:off x="6193369" y="2174875"/>
+            <a:ext cx="5389033" cy="3951288"/>
           </a:xfrm>
         </p:spPr>
         <p:txBody>
-          <a:bodyPr anchor="t">
-            <a:normAutofit/>
-          </a:bodyPr>
-          <a:lstStyle/>
+          <a:bodyPr/>
+          <a:lstStyle>
+            <a:lvl1pPr>
+              <a:defRPr sz="2400"/>
+            </a:lvl1pPr>
+            <a:lvl2pPr>
+              <a:defRPr sz="2000"/>
+            </a:lvl2pPr>
+            <a:lvl3pPr>
+              <a:defRPr sz="1800"/>
+            </a:lvl3pPr>
+            <a:lvl4pPr>
+              <a:defRPr sz="1600"/>
+            </a:lvl4pPr>
+            <a:lvl5pPr>
+              <a:defRPr sz="1600"/>
+            </a:lvl5pPr>
+            <a:lvl6pPr>
+              <a:defRPr sz="1600"/>
+            </a:lvl6pPr>
+            <a:lvl7pPr>
+              <a:defRPr sz="1600"/>
+            </a:lvl7pPr>
+            <a:lvl8pPr>
+              <a:defRPr sz="1600"/>
+            </a:lvl8pPr>
+            <a:lvl9pPr>
+              <a:defRPr sz="1600"/>
+            </a:lvl9pPr>
+          </a:lstStyle>
           <a:p>
             <a:pPr lvl="0"/>
             <a:r>
-              <a:rPr lang="en-US"/>
+              <a:rPr lang="en-US" smtClean="0"/>
               <a:t>Click to edit Master text styles</a:t>
             </a:r>
           </a:p>
           <a:p>
             <a:pPr lvl="1"/>
             <a:r>
-              <a:rPr lang="en-US"/>
+              <a:rPr lang="en-US" smtClean="0"/>
               <a:t>Second level</a:t>
             </a:r>
           </a:p>
           <a:p>
             <a:pPr lvl="2"/>
             <a:r>
-              <a:rPr lang="en-US"/>
+              <a:rPr lang="en-US" smtClean="0"/>
               <a:t>Third level</a:t>
             </a:r>
           </a:p>
           <a:p>
             <a:pPr lvl="3"/>
             <a:r>
-              <a:rPr lang="en-US"/>
+              <a:rPr lang="en-US" smtClean="0"/>
               <a:t>Fourth level</a:t>
             </a:r>
           </a:p>
           <a:p>
             <a:pPr lvl="4"/>
             <a:r>
-              <a:rPr lang="en-US"/>
+              <a:rPr lang="en-US" smtClean="0"/>
               <a:t>Fifth level</a:t>
             </a:r>
-            <a:endParaRPr lang="en-US" dirty="0"/>
+            <a:endParaRPr lang="en-IN"/>
           </a:p>
         </p:txBody>
       </p:sp>
@@ -2509,7 +2164,7 @@
           <a:p>
             <a:fld id="{26136D12-EF89-4721-80C4-D96EAC1C3BDE}" type="datetime1">
               <a:rPr lang="en-IN" smtClean="0"/>
-              <a:t>16-07-2026</a:t>
+              <a:t>21-07-2026</a:t>
             </a:fld>
             <a:endParaRPr lang="en-IN"/>
           </a:p>
@@ -2531,9 +2186,10 @@
           <a:lstStyle/>
           <a:p>
             <a:r>
-              <a:rPr lang="en-IN"/>
+              <a:rPr lang="en-IN" smtClean="0"/>
               <a:t>Doctoral Progress Committee - I</a:t>
             </a:r>
+            <a:endParaRPr lang="en-IN"/>
           </a:p>
         </p:txBody>
       </p:sp>
@@ -2563,7 +2219,7 @@
     </p:spTree>
     <p:extLst>
       <p:ext uri="{BB962C8B-B14F-4D97-AF65-F5344CB8AC3E}">
-        <p14:creationId xmlns:p14="http://schemas.microsoft.com/office/powerpoint/2010/main" val="1270974883"/>
+        <p14:creationId xmlns:p14="http://schemas.microsoft.com/office/powerpoint/2010/main" val="2441779792"/>
       </p:ext>
     </p:extLst>
   </p:cSld>
@@ -2592,46 +2248,7 @@
       </p:grpSpPr>
       <p:sp>
         <p:nvSpPr>
-          <p:cNvPr id="7" name="Rectangle 6"/>
-          <p:cNvSpPr>
-            <a:spLocks noChangeAspect="1"/>
-          </p:cNvSpPr>
-          <p:nvPr/>
-        </p:nvSpPr>
-        <p:spPr>
-          <a:xfrm>
-            <a:off x="440683" y="606554"/>
-            <a:ext cx="11300036" cy="1258827"/>
-          </a:xfrm>
-          <a:prstGeom prst="rect">
-            <a:avLst/>
-          </a:prstGeom>
-          <a:solidFill>
-            <a:schemeClr val="accent1"/>
-          </a:solidFill>
-          <a:ln>
-            <a:noFill/>
-          </a:ln>
-          <a:effectLst/>
-        </p:spPr>
-        <p:style>
-          <a:lnRef idx="1">
-            <a:schemeClr val="accent1"/>
-          </a:lnRef>
-          <a:fillRef idx="3">
-            <a:schemeClr val="accent1"/>
-          </a:fillRef>
-          <a:effectRef idx="2">
-            <a:schemeClr val="accent1"/>
-          </a:effectRef>
-          <a:fontRef idx="minor">
-            <a:schemeClr val="lt1"/>
-          </a:fontRef>
-        </p:style>
-      </p:sp>
-      <p:sp>
-        <p:nvSpPr>
-          <p:cNvPr id="8" name="Title 1"/>
+          <p:cNvPr id="2" name="Title 1"/>
           <p:cNvSpPr>
             <a:spLocks noGrp="1"/>
           </p:cNvSpPr>
@@ -2639,21 +2256,16 @@
             <p:ph type="title"/>
           </p:nvPr>
         </p:nvSpPr>
-        <p:spPr>
-          <a:xfrm>
-            <a:off x="575894" y="729658"/>
-            <a:ext cx="11029616" cy="988332"/>
-          </a:xfrm>
-        </p:spPr>
-        <p:txBody>
-          <a:bodyPr/>
-          <a:lstStyle/>
-          <a:p>
-            <a:r>
-              <a:rPr lang="en-US"/>
+        <p:spPr/>
+        <p:txBody>
+          <a:bodyPr/>
+          <a:lstStyle/>
+          <a:p>
+            <a:r>
+              <a:rPr lang="en-US" smtClean="0"/>
               <a:t>Click to edit Master title style</a:t>
             </a:r>
-            <a:endParaRPr lang="en-US" dirty="0"/>
+            <a:endParaRPr lang="en-IN"/>
           </a:p>
         </p:txBody>
       </p:sp>
@@ -2674,7 +2286,7 @@
           <a:p>
             <a:fld id="{E632162F-2E74-4086-87C6-3BA6D31E101D}" type="datetime1">
               <a:rPr lang="en-IN" smtClean="0"/>
-              <a:t>16-07-2026</a:t>
+              <a:t>21-07-2026</a:t>
             </a:fld>
             <a:endParaRPr lang="en-IN"/>
           </a:p>
@@ -2696,9 +2308,10 @@
           <a:lstStyle/>
           <a:p>
             <a:r>
-              <a:rPr lang="en-IN"/>
+              <a:rPr lang="en-IN" smtClean="0"/>
               <a:t>Doctoral Progress Committee - I</a:t>
             </a:r>
+            <a:endParaRPr lang="en-IN"/>
           </a:p>
         </p:txBody>
       </p:sp>
@@ -2728,7 +2341,7 @@
     </p:spTree>
     <p:extLst>
       <p:ext uri="{BB962C8B-B14F-4D97-AF65-F5344CB8AC3E}">
-        <p14:creationId xmlns:p14="http://schemas.microsoft.com/office/powerpoint/2010/main" val="500332959"/>
+        <p14:creationId xmlns:p14="http://schemas.microsoft.com/office/powerpoint/2010/main" val="4231194711"/>
       </p:ext>
     </p:extLst>
   </p:cSld>
@@ -2772,7 +2385,7 @@
           <a:p>
             <a:fld id="{3DE7F136-074F-4CC6-881E-CA02938A1717}" type="datetime1">
               <a:rPr lang="en-IN" smtClean="0"/>
-              <a:t>16-07-2026</a:t>
+              <a:t>21-07-2026</a:t>
             </a:fld>
             <a:endParaRPr lang="en-IN"/>
           </a:p>
@@ -2794,9 +2407,10 @@
           <a:lstStyle/>
           <a:p>
             <a:r>
-              <a:rPr lang="en-IN"/>
+              <a:rPr lang="en-IN" smtClean="0"/>
               <a:t>Doctoral Progress Committee - I</a:t>
             </a:r>
+            <a:endParaRPr lang="en-IN"/>
           </a:p>
         </p:txBody>
       </p:sp>
@@ -2826,7 +2440,7 @@
     </p:spTree>
     <p:extLst>
       <p:ext uri="{BB962C8B-B14F-4D97-AF65-F5344CB8AC3E}">
-        <p14:creationId xmlns:p14="http://schemas.microsoft.com/office/powerpoint/2010/main" val="997678834"/>
+        <p14:creationId xmlns:p14="http://schemas.microsoft.com/office/powerpoint/2010/main" val="1467763963"/>
       </p:ext>
     </p:extLst>
   </p:cSld>
@@ -2855,237 +2469,147 @@
       </p:grpSpPr>
       <p:sp>
         <p:nvSpPr>
-          <p:cNvPr id="9" name="Rectangle 8"/>
-          <p:cNvSpPr>
-            <a:spLocks noChangeAspect="1"/>
-          </p:cNvSpPr>
-          <p:nvPr/>
+          <p:cNvPr id="2" name="Title 1"/>
+          <p:cNvSpPr>
+            <a:spLocks noGrp="1"/>
+          </p:cNvSpPr>
+          <p:nvPr>
+            <p:ph type="title"/>
+          </p:nvPr>
         </p:nvSpPr>
         <p:spPr>
           <a:xfrm>
-            <a:off x="447817" y="5141973"/>
-            <a:ext cx="11298200" cy="1274702"/>
+            <a:off x="609602" y="273050"/>
+            <a:ext cx="4011084" cy="1162050"/>
           </a:xfrm>
-          <a:prstGeom prst="rect">
-            <a:avLst/>
-          </a:prstGeom>
-          <a:solidFill>
-            <a:schemeClr val="accent1"/>
-          </a:solidFill>
-          <a:ln>
-            <a:noFill/>
-          </a:ln>
-          <a:effectLst/>
         </p:spPr>
-        <p:style>
-          <a:lnRef idx="1">
-            <a:schemeClr val="accent1"/>
-          </a:lnRef>
-          <a:fillRef idx="3">
-            <a:schemeClr val="accent1"/>
-          </a:fillRef>
-          <a:effectRef idx="2">
-            <a:schemeClr val="accent1"/>
-          </a:effectRef>
-          <a:fontRef idx="minor">
-            <a:schemeClr val="lt1"/>
-          </a:fontRef>
-        </p:style>
-      </p:sp>
-      <p:sp>
-        <p:nvSpPr>
-          <p:cNvPr id="2" name="Title 1"/>
-          <p:cNvSpPr>
-            <a:spLocks noGrp="1"/>
-          </p:cNvSpPr>
-          <p:nvPr>
-            <p:ph type="title"/>
+        <p:txBody>
+          <a:bodyPr anchor="b"/>
+          <a:lstStyle>
+            <a:lvl1pPr algn="l">
+              <a:defRPr sz="2000" b="1"/>
+            </a:lvl1pPr>
+          </a:lstStyle>
+          <a:p>
+            <a:r>
+              <a:rPr lang="en-US" smtClean="0"/>
+              <a:t>Click to edit Master title style</a:t>
+            </a:r>
+            <a:endParaRPr lang="en-IN"/>
+          </a:p>
+        </p:txBody>
+      </p:sp>
+      <p:sp>
+        <p:nvSpPr>
+          <p:cNvPr id="3" name="Content Placeholder 2"/>
+          <p:cNvSpPr>
+            <a:spLocks noGrp="1"/>
+          </p:cNvSpPr>
+          <p:nvPr>
+            <p:ph idx="1"/>
           </p:nvPr>
         </p:nvSpPr>
         <p:spPr>
           <a:xfrm>
-            <a:off x="581192" y="5262296"/>
-            <a:ext cx="4909445" cy="689514"/>
+            <a:off x="4766733" y="273053"/>
+            <a:ext cx="6815667" cy="5853113"/>
           </a:xfrm>
         </p:spPr>
         <p:txBody>
-          <a:bodyPr anchor="ctr"/>
+          <a:bodyPr/>
           <a:lstStyle>
-            <a:lvl1pPr algn="l">
-              <a:defRPr sz="2000" b="0">
-                <a:solidFill>
-                  <a:schemeClr val="accent1">
-                    <a:lumMod val="75000"/>
-                    <a:lumOff val="25000"/>
-                  </a:schemeClr>
-                </a:solidFill>
-              </a:defRPr>
+            <a:lvl1pPr>
+              <a:defRPr sz="3200"/>
             </a:lvl1pPr>
+            <a:lvl2pPr>
+              <a:defRPr sz="2800"/>
+            </a:lvl2pPr>
+            <a:lvl3pPr>
+              <a:defRPr sz="2400"/>
+            </a:lvl3pPr>
+            <a:lvl4pPr>
+              <a:defRPr sz="2000"/>
+            </a:lvl4pPr>
+            <a:lvl5pPr>
+              <a:defRPr sz="2000"/>
+            </a:lvl5pPr>
+            <a:lvl6pPr>
+              <a:defRPr sz="2000"/>
+            </a:lvl6pPr>
+            <a:lvl7pPr>
+              <a:defRPr sz="2000"/>
+            </a:lvl7pPr>
+            <a:lvl8pPr>
+              <a:defRPr sz="2000"/>
+            </a:lvl8pPr>
+            <a:lvl9pPr>
+              <a:defRPr sz="2000"/>
+            </a:lvl9pPr>
           </a:lstStyle>
           <a:p>
-            <a:r>
-              <a:rPr lang="en-US"/>
-              <a:t>Click to edit Master title style</a:t>
-            </a:r>
-            <a:endParaRPr lang="en-US" dirty="0"/>
-          </a:p>
-        </p:txBody>
-      </p:sp>
-      <p:sp>
-        <p:nvSpPr>
-          <p:cNvPr id="3" name="Content Placeholder 2"/>
-          <p:cNvSpPr>
-            <a:spLocks noGrp="1"/>
-          </p:cNvSpPr>
-          <p:nvPr>
-            <p:ph idx="1"/>
+            <a:pPr lvl="0"/>
+            <a:r>
+              <a:rPr lang="en-US" smtClean="0"/>
+              <a:t>Click to edit Master text styles</a:t>
+            </a:r>
+          </a:p>
+          <a:p>
+            <a:pPr lvl="1"/>
+            <a:r>
+              <a:rPr lang="en-US" smtClean="0"/>
+              <a:t>Second level</a:t>
+            </a:r>
+          </a:p>
+          <a:p>
+            <a:pPr lvl="2"/>
+            <a:r>
+              <a:rPr lang="en-US" smtClean="0"/>
+              <a:t>Third level</a:t>
+            </a:r>
+          </a:p>
+          <a:p>
+            <a:pPr lvl="3"/>
+            <a:r>
+              <a:rPr lang="en-US" smtClean="0"/>
+              <a:t>Fourth level</a:t>
+            </a:r>
+          </a:p>
+          <a:p>
+            <a:pPr lvl="4"/>
+            <a:r>
+              <a:rPr lang="en-US" smtClean="0"/>
+              <a:t>Fifth level</a:t>
+            </a:r>
+            <a:endParaRPr lang="en-IN"/>
+          </a:p>
+        </p:txBody>
+      </p:sp>
+      <p:sp>
+        <p:nvSpPr>
+          <p:cNvPr id="4" name="Text Placeholder 3"/>
+          <p:cNvSpPr>
+            <a:spLocks noGrp="1"/>
+          </p:cNvSpPr>
+          <p:nvPr>
+            <p:ph type="body" sz="half" idx="2"/>
           </p:nvPr>
         </p:nvSpPr>
         <p:spPr>
           <a:xfrm>
-            <a:off x="447816" y="601200"/>
-            <a:ext cx="11292840" cy="4204800"/>
+            <a:off x="609602" y="1435103"/>
+            <a:ext cx="4011084" cy="4691063"/>
           </a:xfrm>
         </p:spPr>
         <p:txBody>
-          <a:bodyPr anchor="ctr">
-            <a:normAutofit/>
-          </a:bodyPr>
+          <a:bodyPr/>
           <a:lstStyle>
-            <a:lvl1pPr>
-              <a:defRPr sz="2000">
-                <a:solidFill>
-                  <a:schemeClr val="tx2"/>
-                </a:solidFill>
-              </a:defRPr>
-            </a:lvl1pPr>
-            <a:lvl2pPr>
-              <a:defRPr sz="1800">
-                <a:solidFill>
-                  <a:schemeClr val="tx2"/>
-                </a:solidFill>
-              </a:defRPr>
-            </a:lvl2pPr>
-            <a:lvl3pPr>
-              <a:defRPr sz="1600">
-                <a:solidFill>
-                  <a:schemeClr val="tx2"/>
-                </a:solidFill>
-              </a:defRPr>
-            </a:lvl3pPr>
-            <a:lvl4pPr>
-              <a:defRPr sz="1400">
-                <a:solidFill>
-                  <a:schemeClr val="tx2"/>
-                </a:solidFill>
-              </a:defRPr>
-            </a:lvl4pPr>
-            <a:lvl5pPr>
-              <a:defRPr sz="1400">
-                <a:solidFill>
-                  <a:schemeClr val="tx2"/>
-                </a:solidFill>
-              </a:defRPr>
-            </a:lvl5pPr>
-            <a:lvl6pPr>
-              <a:defRPr sz="1400">
-                <a:solidFill>
-                  <a:schemeClr val="tx2"/>
-                </a:solidFill>
-              </a:defRPr>
-            </a:lvl6pPr>
-            <a:lvl7pPr>
-              <a:defRPr sz="1400">
-                <a:solidFill>
-                  <a:schemeClr val="tx2"/>
-                </a:solidFill>
-              </a:defRPr>
-            </a:lvl7pPr>
-            <a:lvl8pPr>
-              <a:defRPr sz="1400">
-                <a:solidFill>
-                  <a:schemeClr val="tx2"/>
-                </a:solidFill>
-              </a:defRPr>
-            </a:lvl8pPr>
-            <a:lvl9pPr>
-              <a:defRPr sz="1400">
-                <a:solidFill>
-                  <a:schemeClr val="tx2"/>
-                </a:solidFill>
-              </a:defRPr>
-            </a:lvl9pPr>
-          </a:lstStyle>
-          <a:p>
-            <a:pPr lvl="0"/>
-            <a:r>
-              <a:rPr lang="en-US"/>
-              <a:t>Click to edit Master text styles</a:t>
-            </a:r>
-          </a:p>
-          <a:p>
-            <a:pPr lvl="1"/>
-            <a:r>
-              <a:rPr lang="en-US"/>
-              <a:t>Second level</a:t>
-            </a:r>
-          </a:p>
-          <a:p>
-            <a:pPr lvl="2"/>
-            <a:r>
-              <a:rPr lang="en-US"/>
-              <a:t>Third level</a:t>
-            </a:r>
-          </a:p>
-          <a:p>
-            <a:pPr lvl="3"/>
-            <a:r>
-              <a:rPr lang="en-US"/>
-              <a:t>Fourth level</a:t>
-            </a:r>
-          </a:p>
-          <a:p>
-            <a:pPr lvl="4"/>
-            <a:r>
-              <a:rPr lang="en-US"/>
-              <a:t>Fifth level</a:t>
-            </a:r>
-            <a:endParaRPr lang="en-US" dirty="0"/>
-          </a:p>
-        </p:txBody>
-      </p:sp>
-      <p:sp>
-        <p:nvSpPr>
-          <p:cNvPr id="4" name="Text Placeholder 3"/>
-          <p:cNvSpPr>
-            <a:spLocks noGrp="1"/>
-          </p:cNvSpPr>
-          <p:nvPr>
-            <p:ph type="body" sz="half" idx="2"/>
-          </p:nvPr>
-        </p:nvSpPr>
-        <p:spPr>
-          <a:xfrm>
-            <a:off x="5740823" y="5262296"/>
-            <a:ext cx="5869987" cy="689515"/>
-          </a:xfrm>
-        </p:spPr>
-        <p:txBody>
-          <a:bodyPr anchor="ctr">
-            <a:normAutofit/>
-          </a:bodyPr>
-          <a:lstStyle>
-            <a:lvl1pPr marL="0" indent="0" algn="r">
-              <a:buNone/>
-              <a:defRPr sz="1100">
-                <a:solidFill>
-                  <a:schemeClr val="bg1"/>
-                </a:solidFill>
-              </a:defRPr>
+            <a:lvl1pPr marL="0" indent="0">
+              <a:buNone/>
+              <a:defRPr sz="1400"/>
             </a:lvl1pPr>
             <a:lvl2pPr marL="457200" indent="0">
               <a:buNone/>
-              <a:defRPr sz="1100"/>
+              <a:defRPr sz="1200"/>
             </a:lvl2pPr>
             <a:lvl3pPr marL="914400" indent="0">
               <a:buNone/>
@@ -3119,7 +2643,7 @@
           <a:p>
             <a:pPr lvl="0"/>
             <a:r>
-              <a:rPr lang="en-US"/>
+              <a:rPr lang="en-US" smtClean="0"/>
               <a:t>Click to edit Master text styles</a:t>
             </a:r>
           </a:p>
@@ -3138,22 +2662,11 @@
         <p:spPr/>
         <p:txBody>
           <a:bodyPr/>
-          <a:lstStyle>
-            <a:lvl1pPr>
-              <a:defRPr>
-                <a:solidFill>
-                  <a:schemeClr val="accent1">
-                    <a:lumMod val="75000"/>
-                    <a:lumOff val="25000"/>
-                  </a:schemeClr>
-                </a:solidFill>
-              </a:defRPr>
-            </a:lvl1pPr>
-          </a:lstStyle>
+          <a:lstStyle/>
           <a:p>
             <a:fld id="{E19575DA-B3DD-48F8-B1F8-389D5AC2AA7A}" type="datetime1">
               <a:rPr lang="en-IN" smtClean="0"/>
-              <a:t>16-07-2026</a:t>
+              <a:t>21-07-2026</a:t>
             </a:fld>
             <a:endParaRPr lang="en-IN"/>
           </a:p>
@@ -3172,23 +2685,13 @@
         <p:spPr/>
         <p:txBody>
           <a:bodyPr/>
-          <a:lstStyle>
-            <a:lvl1pPr>
-              <a:defRPr>
-                <a:solidFill>
-                  <a:schemeClr val="accent1">
-                    <a:lumMod val="75000"/>
-                    <a:lumOff val="25000"/>
-                  </a:schemeClr>
-                </a:solidFill>
-              </a:defRPr>
-            </a:lvl1pPr>
-          </a:lstStyle>
-          <a:p>
-            <a:r>
-              <a:rPr lang="en-IN"/>
+          <a:lstStyle/>
+          <a:p>
+            <a:r>
+              <a:rPr lang="en-IN" smtClean="0"/>
               <a:t>Doctoral Progress Committee - I</a:t>
             </a:r>
+            <a:endParaRPr lang="en-IN"/>
           </a:p>
         </p:txBody>
       </p:sp>
@@ -3205,18 +2708,7 @@
         <p:spPr/>
         <p:txBody>
           <a:bodyPr/>
-          <a:lstStyle>
-            <a:lvl1pPr>
-              <a:defRPr>
-                <a:solidFill>
-                  <a:schemeClr val="accent1">
-                    <a:lumMod val="75000"/>
-                    <a:lumOff val="25000"/>
-                  </a:schemeClr>
-                </a:solidFill>
-              </a:defRPr>
-            </a:lvl1pPr>
-          </a:lstStyle>
+          <a:lstStyle/>
           <a:p>
             <a:fld id="{8D1C8765-CB22-4976-8758-5A372A2DCF34}" type="slidenum">
               <a:rPr lang="en-IN" smtClean="0"/>
@@ -3229,7 +2721,7 @@
     </p:spTree>
     <p:extLst>
       <p:ext uri="{BB962C8B-B14F-4D97-AF65-F5344CB8AC3E}">
-        <p14:creationId xmlns:p14="http://schemas.microsoft.com/office/powerpoint/2010/main" val="1309508873"/>
+        <p14:creationId xmlns:p14="http://schemas.microsoft.com/office/powerpoint/2010/main" val="3713840646"/>
       </p:ext>
     </p:extLst>
   </p:cSld>
@@ -3268,29 +2760,23 @@
         </p:nvSpPr>
         <p:spPr>
           <a:xfrm>
-            <a:off x="581193" y="4693389"/>
-            <a:ext cx="11029616" cy="566738"/>
+            <a:off x="2389717" y="4800600"/>
+            <a:ext cx="7315200" cy="566738"/>
           </a:xfrm>
         </p:spPr>
         <p:txBody>
-          <a:bodyPr anchor="b">
-            <a:normAutofit/>
-          </a:bodyPr>
+          <a:bodyPr anchor="b"/>
           <a:lstStyle>
             <a:lvl1pPr algn="l">
-              <a:defRPr sz="2400" b="0">
-                <a:solidFill>
-                  <a:schemeClr val="accent1"/>
-                </a:solidFill>
-              </a:defRPr>
+              <a:defRPr sz="2000" b="1"/>
             </a:lvl1pPr>
           </a:lstStyle>
           <a:p>
             <a:r>
-              <a:rPr lang="en-US"/>
+              <a:rPr lang="en-US" smtClean="0"/>
               <a:t>Click to edit Master title style</a:t>
             </a:r>
-            <a:endParaRPr lang="en-US" dirty="0"/>
+            <a:endParaRPr lang="en-IN"/>
           </a:p>
         </p:txBody>
       </p:sp>
@@ -3298,7 +2784,7 @@
         <p:nvSpPr>
           <p:cNvPr id="3" name="Picture Placeholder 2"/>
           <p:cNvSpPr>
-            <a:spLocks noGrp="1" noChangeAspect="1"/>
+            <a:spLocks noGrp="1"/>
           </p:cNvSpPr>
           <p:nvPr>
             <p:ph type="pic" idx="1"/>
@@ -3306,58 +2792,52 @@
         </p:nvSpPr>
         <p:spPr>
           <a:xfrm>
-            <a:off x="447817" y="599725"/>
-            <a:ext cx="11290859" cy="3557252"/>
+            <a:off x="2389717" y="612775"/>
+            <a:ext cx="7315200" cy="4114800"/>
           </a:xfrm>
         </p:spPr>
         <p:txBody>
-          <a:bodyPr anchor="t">
-            <a:normAutofit/>
-          </a:bodyPr>
+          <a:bodyPr/>
           <a:lstStyle>
-            <a:lvl1pPr marL="0" indent="0" algn="ctr">
-              <a:buNone/>
-              <a:defRPr sz="1600"/>
+            <a:lvl1pPr marL="0" indent="0">
+              <a:buNone/>
+              <a:defRPr sz="3200"/>
             </a:lvl1pPr>
             <a:lvl2pPr marL="457200" indent="0">
               <a:buNone/>
-              <a:defRPr sz="1600"/>
+              <a:defRPr sz="2800"/>
             </a:lvl2pPr>
             <a:lvl3pPr marL="914400" indent="0">
               <a:buNone/>
-              <a:defRPr sz="1600"/>
+              <a:defRPr sz="2400"/>
             </a:lvl3pPr>
             <a:lvl4pPr marL="1371600" indent="0">
               <a:buNone/>
-              <a:defRPr sz="1600"/>
+              <a:defRPr sz="2000"/>
             </a:lvl4pPr>
             <a:lvl5pPr marL="1828800" indent="0">
               <a:buNone/>
-              <a:defRPr sz="1600"/>
+              <a:defRPr sz="2000"/>
             </a:lvl5pPr>
             <a:lvl6pPr marL="2286000" indent="0">
               <a:buNone/>
-              <a:defRPr sz="1600"/>
+              <a:defRPr sz="2000"/>
             </a:lvl6pPr>
             <a:lvl7pPr marL="2743200" indent="0">
               <a:buNone/>
-              <a:defRPr sz="1600"/>
+              <a:defRPr sz="2000"/>
             </a:lvl7pPr>
             <a:lvl8pPr marL="3200400" indent="0">
               <a:buNone/>
-              <a:defRPr sz="1600"/>
+              <a:defRPr sz="2000"/>
             </a:lvl8pPr>
             <a:lvl9pPr marL="3657600" indent="0">
               <a:buNone/>
-              <a:defRPr sz="1600"/>
+              <a:defRPr sz="2000"/>
             </a:lvl9pPr>
           </a:lstStyle>
           <a:p>
-            <a:r>
-              <a:rPr lang="en-US"/>
-              <a:t>Click icon to add picture</a:t>
-            </a:r>
-            <a:endParaRPr lang="en-US" dirty="0"/>
+            <a:endParaRPr lang="en-IN"/>
           </a:p>
         </p:txBody>
       </p:sp>
@@ -3373,18 +2853,16 @@
         </p:nvSpPr>
         <p:spPr>
           <a:xfrm>
-            <a:off x="581192" y="5260127"/>
-            <a:ext cx="11029617" cy="598671"/>
+            <a:off x="2389717" y="5367338"/>
+            <a:ext cx="7315200" cy="804862"/>
           </a:xfrm>
         </p:spPr>
         <p:txBody>
-          <a:bodyPr>
-            <a:normAutofit/>
-          </a:bodyPr>
+          <a:bodyPr/>
           <a:lstStyle>
             <a:lvl1pPr marL="0" indent="0">
               <a:buNone/>
-              <a:defRPr sz="1200"/>
+              <a:defRPr sz="1400"/>
             </a:lvl1pPr>
             <a:lvl2pPr marL="457200" indent="0">
               <a:buNone/>
@@ -3422,7 +2900,7 @@
           <a:p>
             <a:pPr lvl="0"/>
             <a:r>
-              <a:rPr lang="en-US"/>
+              <a:rPr lang="en-US" smtClean="0"/>
               <a:t>Click to edit Master text styles</a:t>
             </a:r>
           </a:p>
@@ -3445,7 +2923,7 @@
           <a:p>
             <a:fld id="{CAB32E0F-64BD-4910-8E51-675C51D39CE6}" type="datetime1">
               <a:rPr lang="en-IN" smtClean="0"/>
-              <a:t>16-07-2026</a:t>
+              <a:t>21-07-2026</a:t>
             </a:fld>
             <a:endParaRPr lang="en-IN"/>
           </a:p>
@@ -3467,9 +2945,10 @@
           <a:lstStyle/>
           <a:p>
             <a:r>
-              <a:rPr lang="en-IN"/>
+              <a:rPr lang="en-IN" smtClean="0"/>
               <a:t>Doctoral Progress Committee - I</a:t>
             </a:r>
+            <a:endParaRPr lang="en-IN"/>
           </a:p>
         </p:txBody>
       </p:sp>
@@ -3499,7 +2978,7 @@
     </p:spTree>
     <p:extLst>
       <p:ext uri="{BB962C8B-B14F-4D97-AF65-F5344CB8AC3E}">
-        <p14:creationId xmlns:p14="http://schemas.microsoft.com/office/powerpoint/2010/main" val="767863023"/>
+        <p14:creationId xmlns:p14="http://schemas.microsoft.com/office/powerpoint/2010/main" val="1167862712"/>
       </p:ext>
     </p:extLst>
   </p:cSld>
@@ -3543,24 +3022,24 @@
         </p:nvSpPr>
         <p:spPr>
           <a:xfrm>
-            <a:off x="581192" y="705124"/>
-            <a:ext cx="11029616" cy="1189554"/>
+            <a:off x="609600" y="274638"/>
+            <a:ext cx="10972800" cy="1143000"/>
           </a:xfrm>
           <a:prstGeom prst="rect">
             <a:avLst/>
           </a:prstGeom>
         </p:spPr>
         <p:txBody>
-          <a:bodyPr vert="horz" lIns="91440" tIns="45720" rIns="91440" bIns="45720" rtlCol="0" anchor="b">
+          <a:bodyPr vert="horz" lIns="91440" tIns="45720" rIns="91440" bIns="45720" rtlCol="0" anchor="ctr">
             <a:normAutofit/>
           </a:bodyPr>
           <a:lstStyle/>
           <a:p>
             <a:r>
-              <a:rPr lang="en-US"/>
+              <a:rPr lang="en-US" smtClean="0"/>
               <a:t>Click to edit Master title style</a:t>
             </a:r>
-            <a:endParaRPr lang="en-US" dirty="0"/>
+            <a:endParaRPr lang="en-IN"/>
           </a:p>
         </p:txBody>
       </p:sp>
@@ -3576,53 +3055,53 @@
         </p:nvSpPr>
         <p:spPr>
           <a:xfrm>
-            <a:off x="581192" y="2336003"/>
-            <a:ext cx="11029616" cy="3522794"/>
+            <a:off x="609600" y="1600203"/>
+            <a:ext cx="10972800" cy="4525963"/>
           </a:xfrm>
           <a:prstGeom prst="rect">
             <a:avLst/>
           </a:prstGeom>
         </p:spPr>
         <p:txBody>
-          <a:bodyPr vert="horz" lIns="91440" tIns="45720" rIns="91440" bIns="45720" rtlCol="0" anchor="ctr">
+          <a:bodyPr vert="horz" lIns="91440" tIns="45720" rIns="91440" bIns="45720" rtlCol="0">
             <a:normAutofit/>
           </a:bodyPr>
           <a:lstStyle/>
           <a:p>
             <a:pPr lvl="0"/>
             <a:r>
-              <a:rPr lang="en-US"/>
+              <a:rPr lang="en-US" smtClean="0"/>
               <a:t>Click to edit Master text styles</a:t>
             </a:r>
           </a:p>
           <a:p>
             <a:pPr lvl="1"/>
             <a:r>
-              <a:rPr lang="en-US"/>
+              <a:rPr lang="en-US" smtClean="0"/>
               <a:t>Second level</a:t>
             </a:r>
           </a:p>
           <a:p>
             <a:pPr lvl="2"/>
             <a:r>
-              <a:rPr lang="en-US"/>
+              <a:rPr lang="en-US" smtClean="0"/>
               <a:t>Third level</a:t>
             </a:r>
           </a:p>
           <a:p>
             <a:pPr lvl="3"/>
             <a:r>
-              <a:rPr lang="en-US"/>
+              <a:rPr lang="en-US" smtClean="0"/>
               <a:t>Fourth level</a:t>
             </a:r>
           </a:p>
           <a:p>
             <a:pPr lvl="4"/>
             <a:r>
-              <a:rPr lang="en-US"/>
+              <a:rPr lang="en-US" smtClean="0"/>
               <a:t>Fifth level</a:t>
             </a:r>
-            <a:endParaRPr lang="en-US" dirty="0"/>
+            <a:endParaRPr lang="en-IN"/>
           </a:p>
         </p:txBody>
       </p:sp>
@@ -3638,8 +3117,8 @@
         </p:nvSpPr>
         <p:spPr>
           <a:xfrm>
-            <a:off x="7605951" y="5956137"/>
-            <a:ext cx="2844799" cy="365125"/>
+            <a:off x="609600" y="6356353"/>
+            <a:ext cx="2844800" cy="365125"/>
           </a:xfrm>
           <a:prstGeom prst="rect">
             <a:avLst/>
@@ -3648,10 +3127,12 @@
         <p:txBody>
           <a:bodyPr vert="horz" lIns="91440" tIns="45720" rIns="91440" bIns="45720" rtlCol="0" anchor="ctr"/>
           <a:lstStyle>
-            <a:lvl1pPr algn="r">
-              <a:defRPr sz="900">
+            <a:lvl1pPr algn="l">
+              <a:defRPr sz="1200">
                 <a:solidFill>
-                  <a:schemeClr val="accent2"/>
+                  <a:schemeClr val="tx1">
+                    <a:tint val="75000"/>
+                  </a:schemeClr>
                 </a:solidFill>
               </a:defRPr>
             </a:lvl1pPr>
@@ -3659,7 +3140,7 @@
           <a:p>
             <a:fld id="{448E540F-1313-411B-974D-306884E8ED03}" type="datetime1">
               <a:rPr lang="en-IN" smtClean="0"/>
-              <a:t>16-07-2026</a:t>
+              <a:t>21-07-2026</a:t>
             </a:fld>
             <a:endParaRPr lang="en-IN"/>
           </a:p>
@@ -3677,8 +3158,8 @@
         </p:nvSpPr>
         <p:spPr>
           <a:xfrm>
-            <a:off x="581192" y="5951811"/>
-            <a:ext cx="6917210" cy="365125"/>
+            <a:off x="4165600" y="6356353"/>
+            <a:ext cx="3860800" cy="365125"/>
           </a:xfrm>
           <a:prstGeom prst="rect">
             <a:avLst/>
@@ -3687,19 +3168,22 @@
         <p:txBody>
           <a:bodyPr vert="horz" lIns="91440" tIns="45720" rIns="91440" bIns="45720" rtlCol="0" anchor="ctr"/>
           <a:lstStyle>
-            <a:lvl1pPr algn="l">
-              <a:defRPr sz="900" cap="all">
+            <a:lvl1pPr algn="ctr">
+              <a:defRPr sz="1200">
                 <a:solidFill>
-                  <a:schemeClr val="accent2"/>
+                  <a:schemeClr val="tx1">
+                    <a:tint val="75000"/>
+                  </a:schemeClr>
                 </a:solidFill>
               </a:defRPr>
             </a:lvl1pPr>
           </a:lstStyle>
           <a:p>
             <a:r>
-              <a:rPr lang="en-IN"/>
+              <a:rPr lang="en-IN" smtClean="0"/>
               <a:t>Doctoral Progress Committee - I</a:t>
             </a:r>
+            <a:endParaRPr lang="en-IN"/>
           </a:p>
         </p:txBody>
       </p:sp>
@@ -3715,8 +3199,8 @@
         </p:nvSpPr>
         <p:spPr>
           <a:xfrm>
-            <a:off x="10558300" y="5956137"/>
-            <a:ext cx="1052510" cy="365125"/>
+            <a:off x="8737600" y="6356353"/>
+            <a:ext cx="2844800" cy="365125"/>
           </a:xfrm>
           <a:prstGeom prst="rect">
             <a:avLst/>
@@ -3726,9 +3210,11 @@
           <a:bodyPr vert="horz" lIns="91440" tIns="45720" rIns="91440" bIns="45720" rtlCol="0" anchor="ctr"/>
           <a:lstStyle>
             <a:lvl1pPr algn="r">
-              <a:defRPr sz="900">
+              <a:defRPr sz="1200">
                 <a:solidFill>
-                  <a:schemeClr val="accent2"/>
+                  <a:schemeClr val="tx1">
+                    <a:tint val="75000"/>
+                  </a:schemeClr>
                 </a:solidFill>
               </a:defRPr>
             </a:lvl1pPr>
@@ -3742,405 +3228,175 @@
           </a:p>
         </p:txBody>
       </p:sp>
-      <p:sp>
-        <p:nvSpPr>
-          <p:cNvPr id="9" name="Rectangle 8"/>
-          <p:cNvSpPr/>
-          <p:nvPr/>
-        </p:nvSpPr>
-        <p:spPr>
-          <a:xfrm>
-            <a:off x="446534" y="457200"/>
-            <a:ext cx="3703320" cy="94997"/>
-          </a:xfrm>
-          <a:prstGeom prst="rect">
-            <a:avLst/>
-          </a:prstGeom>
-          <a:solidFill>
-            <a:schemeClr val="accent1"/>
-          </a:solidFill>
-          <a:ln>
-            <a:noFill/>
-          </a:ln>
-          <a:effectLst/>
-        </p:spPr>
-        <p:style>
-          <a:lnRef idx="1">
-            <a:schemeClr val="accent1"/>
-          </a:lnRef>
-          <a:fillRef idx="3">
-            <a:schemeClr val="accent1"/>
-          </a:fillRef>
-          <a:effectRef idx="2">
-            <a:schemeClr val="accent1"/>
-          </a:effectRef>
-          <a:fontRef idx="minor">
-            <a:schemeClr val="lt1"/>
-          </a:fontRef>
-        </p:style>
-      </p:sp>
-      <p:sp>
-        <p:nvSpPr>
-          <p:cNvPr id="10" name="Rectangle 9"/>
-          <p:cNvSpPr/>
-          <p:nvPr/>
-        </p:nvSpPr>
-        <p:spPr>
-          <a:xfrm>
-            <a:off x="8042147" y="453643"/>
-            <a:ext cx="3703320" cy="98554"/>
-          </a:xfrm>
-          <a:prstGeom prst="rect">
-            <a:avLst/>
-          </a:prstGeom>
-          <a:solidFill>
-            <a:schemeClr val="accent4"/>
-          </a:solidFill>
-          <a:ln>
-            <a:noFill/>
-          </a:ln>
-          <a:effectLst/>
-        </p:spPr>
-        <p:style>
-          <a:lnRef idx="1">
-            <a:schemeClr val="accent1"/>
-          </a:lnRef>
-          <a:fillRef idx="3">
-            <a:schemeClr val="accent1"/>
-          </a:fillRef>
-          <a:effectRef idx="2">
-            <a:schemeClr val="accent1"/>
-          </a:effectRef>
-          <a:fontRef idx="minor">
-            <a:schemeClr val="lt1"/>
-          </a:fontRef>
-        </p:style>
-      </p:sp>
-      <p:sp>
-        <p:nvSpPr>
-          <p:cNvPr id="11" name="Rectangle 10"/>
-          <p:cNvSpPr/>
-          <p:nvPr/>
-        </p:nvSpPr>
-        <p:spPr>
-          <a:xfrm>
-            <a:off x="4241830" y="457200"/>
-            <a:ext cx="3703320" cy="91440"/>
-          </a:xfrm>
-          <a:prstGeom prst="rect">
-            <a:avLst/>
-          </a:prstGeom>
-          <a:solidFill>
-            <a:schemeClr val="accent2"/>
-          </a:solidFill>
-          <a:ln>
-            <a:noFill/>
-          </a:ln>
-          <a:effectLst/>
-        </p:spPr>
-        <p:style>
-          <a:lnRef idx="1">
-            <a:schemeClr val="accent1"/>
-          </a:lnRef>
-          <a:fillRef idx="3">
-            <a:schemeClr val="accent1"/>
-          </a:fillRef>
-          <a:effectRef idx="2">
-            <a:schemeClr val="accent1"/>
-          </a:effectRef>
-          <a:fontRef idx="minor">
-            <a:schemeClr val="lt1"/>
-          </a:fontRef>
-        </p:style>
-      </p:sp>
     </p:spTree>
     <p:extLst>
       <p:ext uri="{BB962C8B-B14F-4D97-AF65-F5344CB8AC3E}">
-        <p14:creationId xmlns:p14="http://schemas.microsoft.com/office/powerpoint/2010/main" val="2533524578"/>
+        <p14:creationId xmlns:p14="http://schemas.microsoft.com/office/powerpoint/2010/main" val="1008902963"/>
       </p:ext>
     </p:extLst>
   </p:cSld>
   <p:clrMap bg1="lt1" tx1="dk1" bg2="lt2" tx2="dk2" accent1="accent1" accent2="accent2" accent3="accent3" accent4="accent4" accent5="accent5" accent6="accent6" hlink="hlink" folHlink="folHlink"/>
   <p:sldLayoutIdLst>
-    <p:sldLayoutId id="2147483661" r:id="rId1"/>
-    <p:sldLayoutId id="2147483662" r:id="rId2"/>
-    <p:sldLayoutId id="2147483663" r:id="rId3"/>
-    <p:sldLayoutId id="2147483664" r:id="rId4"/>
-    <p:sldLayoutId id="2147483665" r:id="rId5"/>
-    <p:sldLayoutId id="2147483666" r:id="rId6"/>
-    <p:sldLayoutId id="2147483667" r:id="rId7"/>
-    <p:sldLayoutId id="2147483668" r:id="rId8"/>
-    <p:sldLayoutId id="2147483669" r:id="rId9"/>
-    <p:sldLayoutId id="2147483670" r:id="rId10"/>
-    <p:sldLayoutId id="2147483671" r:id="rId11"/>
+    <p:sldLayoutId id="2147483673" r:id="rId1"/>
+    <p:sldLayoutId id="2147483674" r:id="rId2"/>
+    <p:sldLayoutId id="2147483675" r:id="rId3"/>
+    <p:sldLayoutId id="2147483676" r:id="rId4"/>
+    <p:sldLayoutId id="2147483677" r:id="rId5"/>
+    <p:sldLayoutId id="2147483678" r:id="rId6"/>
+    <p:sldLayoutId id="2147483679" r:id="rId7"/>
+    <p:sldLayoutId id="2147483680" r:id="rId8"/>
+    <p:sldLayoutId id="2147483681" r:id="rId9"/>
+    <p:sldLayoutId id="2147483682" r:id="rId10"/>
+    <p:sldLayoutId id="2147483683" r:id="rId11"/>
   </p:sldLayoutIdLst>
   <p:hf hdr="0"/>
   <p:txStyles>
     <p:titleStyle>
-      <a:lvl1pPr algn="l" defTabSz="457200" rtl="0" eaLnBrk="1" latinLnBrk="0" hangingPunct="1">
+      <a:lvl1pPr algn="ctr" defTabSz="914400" rtl="0" eaLnBrk="1" latinLnBrk="0" hangingPunct="1">
         <a:spcBef>
           <a:spcPct val="0"/>
         </a:spcBef>
         <a:buNone/>
-        <a:defRPr sz="2800" b="0" kern="1200" cap="all">
+        <a:defRPr sz="4400" kern="1200">
           <a:solidFill>
-            <a:schemeClr val="bg1"/>
+            <a:schemeClr val="tx1"/>
           </a:solidFill>
           <a:latin typeface="+mj-lt"/>
           <a:ea typeface="+mj-ea"/>
           <a:cs typeface="+mj-cs"/>
         </a:defRPr>
       </a:lvl1pPr>
-      <a:lvl2pPr eaLnBrk="1" hangingPunct="1">
-        <a:defRPr>
-          <a:solidFill>
-            <a:schemeClr val="tx2"/>
-          </a:solidFill>
-        </a:defRPr>
-      </a:lvl2pPr>
-      <a:lvl3pPr eaLnBrk="1" hangingPunct="1">
-        <a:defRPr>
-          <a:solidFill>
-            <a:schemeClr val="tx2"/>
-          </a:solidFill>
-        </a:defRPr>
-      </a:lvl3pPr>
-      <a:lvl4pPr eaLnBrk="1" hangingPunct="1">
-        <a:defRPr>
-          <a:solidFill>
-            <a:schemeClr val="tx2"/>
-          </a:solidFill>
-        </a:defRPr>
-      </a:lvl4pPr>
-      <a:lvl5pPr eaLnBrk="1" hangingPunct="1">
-        <a:defRPr>
-          <a:solidFill>
-            <a:schemeClr val="tx2"/>
-          </a:solidFill>
-        </a:defRPr>
-      </a:lvl5pPr>
-      <a:lvl6pPr eaLnBrk="1" hangingPunct="1">
-        <a:defRPr>
-          <a:solidFill>
-            <a:schemeClr val="tx2"/>
-          </a:solidFill>
-        </a:defRPr>
-      </a:lvl6pPr>
-      <a:lvl7pPr eaLnBrk="1" hangingPunct="1">
-        <a:defRPr>
-          <a:solidFill>
-            <a:schemeClr val="tx2"/>
-          </a:solidFill>
-        </a:defRPr>
-      </a:lvl7pPr>
-      <a:lvl8pPr eaLnBrk="1" hangingPunct="1">
-        <a:defRPr>
-          <a:solidFill>
-            <a:schemeClr val="tx2"/>
-          </a:solidFill>
-        </a:defRPr>
-      </a:lvl8pPr>
-      <a:lvl9pPr eaLnBrk="1" hangingPunct="1">
-        <a:defRPr>
-          <a:solidFill>
-            <a:schemeClr val="tx2"/>
-          </a:solidFill>
-        </a:defRPr>
-      </a:lvl9pPr>
     </p:titleStyle>
     <p:bodyStyle>
-      <a:lvl1pPr marL="306000" indent="-306000" algn="l" defTabSz="457200" rtl="0" eaLnBrk="1" latinLnBrk="0" hangingPunct="1">
+      <a:lvl1pPr marL="342900" indent="-342900" algn="l" defTabSz="914400" rtl="0" eaLnBrk="1" latinLnBrk="0" hangingPunct="1">
         <a:spcBef>
           <a:spcPct val="20000"/>
         </a:spcBef>
-        <a:spcAft>
-          <a:spcPts val="600"/>
-        </a:spcAft>
-        <a:buClr>
-          <a:schemeClr val="accent2"/>
-        </a:buClr>
-        <a:buSzPct val="92000"/>
-        <a:buFont typeface="Wingdings 2" panose="05020102010507070707" pitchFamily="18" charset="2"/>
-        <a:buChar char=""/>
-        <a:defRPr sz="1800" kern="1200">
+        <a:buFont typeface="Arial" pitchFamily="34" charset="0"/>
+        <a:buChar char="•"/>
+        <a:defRPr sz="3200" kern="1200">
           <a:solidFill>
-            <a:schemeClr val="tx2"/>
+            <a:schemeClr val="tx1"/>
           </a:solidFill>
           <a:latin typeface="+mn-lt"/>
           <a:ea typeface="+mn-ea"/>
           <a:cs typeface="+mn-cs"/>
         </a:defRPr>
       </a:lvl1pPr>
-      <a:lvl2pPr marL="630000" indent="-306000" algn="l" defTabSz="457200" rtl="0" eaLnBrk="1" latinLnBrk="0" hangingPunct="1">
+      <a:lvl2pPr marL="742950" indent="-285750" algn="l" defTabSz="914400" rtl="0" eaLnBrk="1" latinLnBrk="0" hangingPunct="1">
         <a:spcBef>
           <a:spcPct val="20000"/>
         </a:spcBef>
-        <a:spcAft>
-          <a:spcPts val="600"/>
-        </a:spcAft>
-        <a:buClr>
-          <a:schemeClr val="accent2"/>
-        </a:buClr>
-        <a:buSzPct val="92000"/>
-        <a:buFont typeface="Wingdings 2" panose="05020102010507070707" pitchFamily="18" charset="2"/>
-        <a:buChar char=""/>
-        <a:defRPr sz="1600" kern="1200">
+        <a:buFont typeface="Arial" pitchFamily="34" charset="0"/>
+        <a:buChar char="–"/>
+        <a:defRPr sz="2800" kern="1200">
           <a:solidFill>
-            <a:schemeClr val="tx2"/>
+            <a:schemeClr val="tx1"/>
           </a:solidFill>
           <a:latin typeface="+mn-lt"/>
           <a:ea typeface="+mn-ea"/>
           <a:cs typeface="+mn-cs"/>
         </a:defRPr>
       </a:lvl2pPr>
-      <a:lvl3pPr marL="900000" indent="-270000" algn="l" defTabSz="457200" rtl="0" eaLnBrk="1" latinLnBrk="0" hangingPunct="1">
+      <a:lvl3pPr marL="1143000" indent="-228600" algn="l" defTabSz="914400" rtl="0" eaLnBrk="1" latinLnBrk="0" hangingPunct="1">
         <a:spcBef>
           <a:spcPct val="20000"/>
         </a:spcBef>
-        <a:spcAft>
-          <a:spcPts val="600"/>
-        </a:spcAft>
-        <a:buClr>
-          <a:schemeClr val="accent2"/>
-        </a:buClr>
-        <a:buSzPct val="92000"/>
-        <a:buFont typeface="Wingdings 2" panose="05020102010507070707" pitchFamily="18" charset="2"/>
-        <a:buChar char=""/>
-        <a:defRPr sz="1400" kern="1200">
+        <a:buFont typeface="Arial" pitchFamily="34" charset="0"/>
+        <a:buChar char="•"/>
+        <a:defRPr sz="2400" kern="1200">
           <a:solidFill>
-            <a:schemeClr val="tx2"/>
+            <a:schemeClr val="tx1"/>
           </a:solidFill>
           <a:latin typeface="+mn-lt"/>
           <a:ea typeface="+mn-ea"/>
           <a:cs typeface="+mn-cs"/>
         </a:defRPr>
       </a:lvl3pPr>
-      <a:lvl4pPr marL="1242000" indent="-234000" algn="l" defTabSz="457200" rtl="0" eaLnBrk="1" latinLnBrk="0" hangingPunct="1">
+      <a:lvl4pPr marL="1600200" indent="-228600" algn="l" defTabSz="914400" rtl="0" eaLnBrk="1" latinLnBrk="0" hangingPunct="1">
         <a:spcBef>
           <a:spcPct val="20000"/>
         </a:spcBef>
-        <a:spcAft>
-          <a:spcPts val="600"/>
-        </a:spcAft>
-        <a:buClr>
-          <a:schemeClr val="accent2"/>
-        </a:buClr>
-        <a:buSzPct val="92000"/>
-        <a:buFont typeface="Wingdings 2" panose="05020102010507070707" pitchFamily="18" charset="2"/>
-        <a:buChar char=""/>
-        <a:defRPr sz="1200" kern="1200">
+        <a:buFont typeface="Arial" pitchFamily="34" charset="0"/>
+        <a:buChar char="–"/>
+        <a:defRPr sz="2000" kern="1200">
           <a:solidFill>
-            <a:schemeClr val="tx2"/>
+            <a:schemeClr val="tx1"/>
           </a:solidFill>
           <a:latin typeface="+mn-lt"/>
           <a:ea typeface="+mn-ea"/>
           <a:cs typeface="+mn-cs"/>
         </a:defRPr>
       </a:lvl4pPr>
-      <a:lvl5pPr marL="1602000" indent="-234000" algn="l" defTabSz="457200" rtl="0" eaLnBrk="1" latinLnBrk="0" hangingPunct="1">
+      <a:lvl5pPr marL="2057400" indent="-228600" algn="l" defTabSz="914400" rtl="0" eaLnBrk="1" latinLnBrk="0" hangingPunct="1">
         <a:spcBef>
           <a:spcPct val="20000"/>
         </a:spcBef>
-        <a:spcAft>
-          <a:spcPts val="600"/>
-        </a:spcAft>
-        <a:buClr>
-          <a:schemeClr val="accent2"/>
-        </a:buClr>
-        <a:buSzPct val="92000"/>
-        <a:buFont typeface="Wingdings 2" panose="05020102010507070707" pitchFamily="18" charset="2"/>
-        <a:buChar char=""/>
-        <a:defRPr sz="1200" kern="1200">
+        <a:buFont typeface="Arial" pitchFamily="34" charset="0"/>
+        <a:buChar char="»"/>
+        <a:defRPr sz="2000" kern="1200">
           <a:solidFill>
-            <a:schemeClr val="tx2"/>
+            <a:schemeClr val="tx1"/>
           </a:solidFill>
           <a:latin typeface="+mn-lt"/>
           <a:ea typeface="+mn-ea"/>
           <a:cs typeface="+mn-cs"/>
         </a:defRPr>
       </a:lvl5pPr>
-      <a:lvl6pPr marL="1900000" indent="-228600" algn="l" defTabSz="457200" rtl="0" eaLnBrk="1" latinLnBrk="0" hangingPunct="1">
+      <a:lvl6pPr marL="2514600" indent="-228600" algn="l" defTabSz="914400" rtl="0" eaLnBrk="1" latinLnBrk="0" hangingPunct="1">
         <a:spcBef>
           <a:spcPct val="20000"/>
         </a:spcBef>
-        <a:spcAft>
-          <a:spcPts val="600"/>
-        </a:spcAft>
-        <a:buClr>
-          <a:schemeClr val="accent2"/>
-        </a:buClr>
-        <a:buSzPct val="92000"/>
-        <a:buFont typeface="Wingdings 2" panose="05020102010507070707" pitchFamily="18" charset="2"/>
-        <a:buChar char=""/>
-        <a:defRPr sz="1200" kern="1200">
+        <a:buFont typeface="Arial" pitchFamily="34" charset="0"/>
+        <a:buChar char="•"/>
+        <a:defRPr sz="2000" kern="1200">
           <a:solidFill>
-            <a:schemeClr val="tx2"/>
+            <a:schemeClr val="tx1"/>
           </a:solidFill>
           <a:latin typeface="+mn-lt"/>
           <a:ea typeface="+mn-ea"/>
           <a:cs typeface="+mn-cs"/>
         </a:defRPr>
       </a:lvl6pPr>
-      <a:lvl7pPr marL="2200000" indent="-228600" algn="l" defTabSz="457200" rtl="0" eaLnBrk="1" latinLnBrk="0" hangingPunct="1">
+      <a:lvl7pPr marL="2971800" indent="-228600" algn="l" defTabSz="914400" rtl="0" eaLnBrk="1" latinLnBrk="0" hangingPunct="1">
         <a:spcBef>
           <a:spcPct val="20000"/>
         </a:spcBef>
-        <a:spcAft>
-          <a:spcPts val="600"/>
-        </a:spcAft>
-        <a:buClr>
-          <a:schemeClr val="accent2"/>
-        </a:buClr>
-        <a:buSzPct val="92000"/>
-        <a:buFont typeface="Wingdings 2" panose="05020102010507070707" pitchFamily="18" charset="2"/>
-        <a:buChar char=""/>
-        <a:defRPr sz="1200" kern="1200">
+        <a:buFont typeface="Arial" pitchFamily="34" charset="0"/>
+        <a:buChar char="•"/>
+        <a:defRPr sz="2000" kern="1200">
           <a:solidFill>
-            <a:schemeClr val="tx2"/>
+            <a:schemeClr val="tx1"/>
           </a:solidFill>
           <a:latin typeface="+mn-lt"/>
           <a:ea typeface="+mn-ea"/>
           <a:cs typeface="+mn-cs"/>
         </a:defRPr>
       </a:lvl7pPr>
-      <a:lvl8pPr marL="2500000" indent="-228600" algn="l" defTabSz="457200" rtl="0" eaLnBrk="1" latinLnBrk="0" hangingPunct="1">
+      <a:lvl8pPr marL="3429000" indent="-228600" algn="l" defTabSz="914400" rtl="0" eaLnBrk="1" latinLnBrk="0" hangingPunct="1">
         <a:spcBef>
           <a:spcPct val="20000"/>
         </a:spcBef>
-        <a:spcAft>
-          <a:spcPts val="600"/>
-        </a:spcAft>
-        <a:buClr>
-          <a:schemeClr val="accent2"/>
-        </a:buClr>
-        <a:buSzPct val="92000"/>
-        <a:buFont typeface="Wingdings 2" panose="05020102010507070707" pitchFamily="18" charset="2"/>
-        <a:buChar char=""/>
-        <a:defRPr sz="1200" kern="1200">
+        <a:buFont typeface="Arial" pitchFamily="34" charset="0"/>
+        <a:buChar char="•"/>
+        <a:defRPr sz="2000" kern="1200">
           <a:solidFill>
-            <a:schemeClr val="tx2"/>
+            <a:schemeClr val="tx1"/>
           </a:solidFill>
           <a:latin typeface="+mn-lt"/>
           <a:ea typeface="+mn-ea"/>
           <a:cs typeface="+mn-cs"/>
         </a:defRPr>
       </a:lvl8pPr>
-      <a:lvl9pPr marL="2800000" indent="-228600" algn="l" defTabSz="457200" rtl="0" eaLnBrk="1" latinLnBrk="0" hangingPunct="1">
+      <a:lvl9pPr marL="3886200" indent="-228600" algn="l" defTabSz="914400" rtl="0" eaLnBrk="1" latinLnBrk="0" hangingPunct="1">
         <a:spcBef>
           <a:spcPct val="20000"/>
         </a:spcBef>
-        <a:spcAft>
-          <a:spcPts val="600"/>
-        </a:spcAft>
-        <a:buClr>
-          <a:schemeClr val="accent2"/>
-        </a:buClr>
-        <a:buSzPct val="92000"/>
-        <a:buFont typeface="Wingdings 2" panose="05020102010507070707" pitchFamily="18" charset="2"/>
-        <a:buChar char=""/>
-        <a:defRPr sz="1200" kern="1200">
+        <a:buFont typeface="Arial" pitchFamily="34" charset="0"/>
+        <a:buChar char="•"/>
+        <a:defRPr sz="2000" kern="1200">
           <a:solidFill>
-            <a:schemeClr val="tx2"/>
+            <a:schemeClr val="tx1"/>
           </a:solidFill>
           <a:latin typeface="+mn-lt"/>
           <a:ea typeface="+mn-ea"/>
@@ -4152,7 +3408,7 @@
       <a:defPPr>
         <a:defRPr lang="en-US"/>
       </a:defPPr>
-      <a:lvl1pPr marL="0" algn="l" defTabSz="457200" rtl="0" eaLnBrk="1" latinLnBrk="0" hangingPunct="1">
+      <a:lvl1pPr marL="0" algn="l" defTabSz="914400" rtl="0" eaLnBrk="1" latinLnBrk="0" hangingPunct="1">
         <a:defRPr sz="1800" kern="1200">
           <a:solidFill>
             <a:schemeClr val="tx1"/>
@@ -4162,7 +3418,7 @@
           <a:cs typeface="+mn-cs"/>
         </a:defRPr>
       </a:lvl1pPr>
-      <a:lvl2pPr marL="457200" algn="l" defTabSz="457200" rtl="0" eaLnBrk="1" latinLnBrk="0" hangingPunct="1">
+      <a:lvl2pPr marL="457200" algn="l" defTabSz="914400" rtl="0" eaLnBrk="1" latinLnBrk="0" hangingPunct="1">
         <a:defRPr sz="1800" kern="1200">
           <a:solidFill>
             <a:schemeClr val="tx1"/>
@@ -4172,7 +3428,7 @@
           <a:cs typeface="+mn-cs"/>
         </a:defRPr>
       </a:lvl2pPr>
-      <a:lvl3pPr marL="914400" algn="l" defTabSz="457200" rtl="0" eaLnBrk="1" latinLnBrk="0" hangingPunct="1">
+      <a:lvl3pPr marL="914400" algn="l" defTabSz="914400" rtl="0" eaLnBrk="1" latinLnBrk="0" hangingPunct="1">
         <a:defRPr sz="1800" kern="1200">
           <a:solidFill>
             <a:schemeClr val="tx1"/>
@@ -4182,7 +3438,7 @@
           <a:cs typeface="+mn-cs"/>
         </a:defRPr>
       </a:lvl3pPr>
-      <a:lvl4pPr marL="1371600" algn="l" defTabSz="457200" rtl="0" eaLnBrk="1" latinLnBrk="0" hangingPunct="1">
+      <a:lvl4pPr marL="1371600" algn="l" defTabSz="914400" rtl="0" eaLnBrk="1" latinLnBrk="0" hangingPunct="1">
         <a:defRPr sz="1800" kern="1200">
           <a:solidFill>
             <a:schemeClr val="tx1"/>
@@ -4192,7 +3448,7 @@
           <a:cs typeface="+mn-cs"/>
         </a:defRPr>
       </a:lvl4pPr>
-      <a:lvl5pPr marL="1828800" algn="l" defTabSz="457200" rtl="0" eaLnBrk="1" latinLnBrk="0" hangingPunct="1">
+      <a:lvl5pPr marL="1828800" algn="l" defTabSz="914400" rtl="0" eaLnBrk="1" latinLnBrk="0" hangingPunct="1">
         <a:defRPr sz="1800" kern="1200">
           <a:solidFill>
             <a:schemeClr val="tx1"/>
@@ -4202,7 +3458,7 @@
           <a:cs typeface="+mn-cs"/>
         </a:defRPr>
       </a:lvl5pPr>
-      <a:lvl6pPr marL="2286000" algn="l" defTabSz="457200" rtl="0" eaLnBrk="1" latinLnBrk="0" hangingPunct="1">
+      <a:lvl6pPr marL="2286000" algn="l" defTabSz="914400" rtl="0" eaLnBrk="1" latinLnBrk="0" hangingPunct="1">
         <a:defRPr sz="1800" kern="1200">
           <a:solidFill>
             <a:schemeClr val="tx1"/>
@@ -4212,7 +3468,7 @@
           <a:cs typeface="+mn-cs"/>
         </a:defRPr>
       </a:lvl6pPr>
-      <a:lvl7pPr marL="2743200" algn="l" defTabSz="457200" rtl="0" eaLnBrk="1" latinLnBrk="0" hangingPunct="1">
+      <a:lvl7pPr marL="2743200" algn="l" defTabSz="914400" rtl="0" eaLnBrk="1" latinLnBrk="0" hangingPunct="1">
         <a:defRPr sz="1800" kern="1200">
           <a:solidFill>
             <a:schemeClr val="tx1"/>
@@ -4222,7 +3478,7 @@
           <a:cs typeface="+mn-cs"/>
         </a:defRPr>
       </a:lvl7pPr>
-      <a:lvl8pPr marL="3200400" algn="l" defTabSz="457200" rtl="0" eaLnBrk="1" latinLnBrk="0" hangingPunct="1">
+      <a:lvl8pPr marL="3200400" algn="l" defTabSz="914400" rtl="0" eaLnBrk="1" latinLnBrk="0" hangingPunct="1">
         <a:defRPr sz="1800" kern="1200">
           <a:solidFill>
             <a:schemeClr val="tx1"/>
@@ -4232,7 +3488,7 @@
           <a:cs typeface="+mn-cs"/>
         </a:defRPr>
       </a:lvl8pPr>
-      <a:lvl9pPr marL="3657600" algn="l" defTabSz="457200" rtl="0" eaLnBrk="1" latinLnBrk="0" hangingPunct="1">
+      <a:lvl9pPr marL="3657600" algn="l" defTabSz="914400" rtl="0" eaLnBrk="1" latinLnBrk="0" hangingPunct="1">
         <a:defRPr sz="1800" kern="1200">
           <a:solidFill>
             <a:schemeClr val="tx1"/>
@@ -4269,7 +3525,7 @@
           <p:cNvPr id="2" name="Title 1">
             <a:extLst>
               <a:ext uri="{FF2B5EF4-FFF2-40B4-BE49-F238E27FC236}">
-                <a16:creationId xmlns:a16="http://schemas.microsoft.com/office/drawing/2014/main" xmlns="" id="{970899AD-1C63-F328-ED69-02D17CF3D411}"/>
+                <a16:creationId xmlns="" xmlns:a16="http://schemas.microsoft.com/office/drawing/2014/main" id="{970899AD-1C63-F328-ED69-02D17CF3D411}"/>
               </a:ext>
             </a:extLst>
           </p:cNvPr>
@@ -4352,7 +3608,7 @@
           <p:cNvPr id="3" name="Subtitle 2">
             <a:extLst>
               <a:ext uri="{FF2B5EF4-FFF2-40B4-BE49-F238E27FC236}">
-                <a16:creationId xmlns:a16="http://schemas.microsoft.com/office/drawing/2014/main" xmlns="" id="{3DDDC847-DCC5-73F1-3166-8CB83021E353}"/>
+                <a16:creationId xmlns="" xmlns:a16="http://schemas.microsoft.com/office/drawing/2014/main" id="{3DDDC847-DCC5-73F1-3166-8CB83021E353}"/>
               </a:ext>
             </a:extLst>
           </p:cNvPr>
@@ -4382,7 +3638,7 @@
             </a:pPr>
             <a:endParaRPr lang="en-US" sz="2200" b="1" cap="none" dirty="0">
               <a:solidFill>
-                <a:schemeClr val="bg1"/>
+                <a:schemeClr val="tx1"/>
               </a:solidFill>
               <a:latin typeface="Times New Roman" panose="02020603050405020304" pitchFamily="18" charset="0"/>
               <a:cs typeface="Times New Roman" panose="02020603050405020304" pitchFamily="18" charset="0"/>
@@ -4397,7 +3653,7 @@
             <a:r>
               <a:rPr lang="en-US" sz="2200" b="1" cap="none" dirty="0">
                 <a:solidFill>
-                  <a:schemeClr val="bg1"/>
+                  <a:schemeClr val="tx1"/>
                 </a:solidFill>
                 <a:latin typeface="Times New Roman" panose="02020603050405020304" pitchFamily="18" charset="0"/>
                 <a:cs typeface="Times New Roman" panose="02020603050405020304" pitchFamily="18" charset="0"/>
@@ -4407,7 +3663,7 @@
             <a:r>
               <a:rPr lang="en-US" sz="2200" b="1" cap="none" dirty="0" smtClean="0">
                 <a:solidFill>
-                  <a:schemeClr val="bg1"/>
+                  <a:schemeClr val="tx1"/>
                 </a:solidFill>
                 <a:latin typeface="Times New Roman" panose="02020603050405020304" pitchFamily="18" charset="0"/>
                 <a:cs typeface="Times New Roman" panose="02020603050405020304" pitchFamily="18" charset="0"/>
@@ -4423,7 +3679,7 @@
             </a:pPr>
             <a:endParaRPr lang="en-US" sz="2200" b="1" cap="none" dirty="0">
               <a:solidFill>
-                <a:schemeClr val="bg1"/>
+                <a:schemeClr val="tx1"/>
               </a:solidFill>
               <a:latin typeface="Times New Roman" panose="02020603050405020304" pitchFamily="18" charset="0"/>
               <a:cs typeface="Times New Roman" panose="02020603050405020304" pitchFamily="18" charset="0"/>
@@ -4438,7 +3694,7 @@
             <a:r>
               <a:rPr lang="en-US" sz="2200" b="1" cap="none" dirty="0">
                 <a:solidFill>
-                  <a:schemeClr val="bg1"/>
+                  <a:schemeClr val="tx1"/>
                 </a:solidFill>
                 <a:latin typeface="Times New Roman" panose="02020603050405020304" pitchFamily="18" charset="0"/>
                 <a:cs typeface="Times New Roman" panose="02020603050405020304" pitchFamily="18" charset="0"/>
@@ -4448,7 +3704,7 @@
             <a:r>
               <a:rPr lang="en-US" sz="2200" b="1" cap="none" dirty="0" smtClean="0">
                 <a:solidFill>
-                  <a:schemeClr val="bg1"/>
+                  <a:schemeClr val="tx1"/>
                 </a:solidFill>
                 <a:latin typeface="Times New Roman" panose="02020603050405020304" pitchFamily="18" charset="0"/>
                 <a:cs typeface="Times New Roman" panose="02020603050405020304" pitchFamily="18" charset="0"/>
@@ -4458,7 +3714,7 @@
             <a:r>
               <a:rPr lang="en-US" sz="2200" b="1" cap="none" dirty="0">
                 <a:solidFill>
-                  <a:schemeClr val="bg1"/>
+                  <a:schemeClr val="tx1"/>
                 </a:solidFill>
                 <a:latin typeface="Times New Roman" panose="02020603050405020304" pitchFamily="18" charset="0"/>
                 <a:cs typeface="Times New Roman" panose="02020603050405020304" pitchFamily="18" charset="0"/>
@@ -4474,7 +3730,7 @@
             </a:pPr>
             <a:endParaRPr lang="en-US" sz="2200" b="1" cap="none" dirty="0">
               <a:solidFill>
-                <a:schemeClr val="bg1"/>
+                <a:schemeClr val="tx1"/>
               </a:solidFill>
               <a:latin typeface="Times New Roman" panose="02020603050405020304" pitchFamily="18" charset="0"/>
               <a:cs typeface="Times New Roman" panose="02020603050405020304" pitchFamily="18" charset="0"/>
@@ -4489,7 +3745,7 @@
             <a:r>
               <a:rPr lang="en-IN" sz="2200" b="1" cap="none" dirty="0">
                 <a:solidFill>
-                  <a:schemeClr val="bg1"/>
+                  <a:schemeClr val="tx1"/>
                 </a:solidFill>
                 <a:latin typeface="Times New Roman" panose="02020603050405020304" pitchFamily="18" charset="0"/>
                 <a:cs typeface="Times New Roman" panose="02020603050405020304" pitchFamily="18" charset="0"/>
@@ -4503,7 +3759,11 @@
                 <a:spcPct val="80000"/>
               </a:lnSpc>
             </a:pPr>
-            <a:endParaRPr lang="en-US" sz="2400" dirty="0"/>
+            <a:endParaRPr lang="en-US" sz="2400" dirty="0">
+              <a:solidFill>
+                <a:schemeClr val="tx1"/>
+              </a:solidFill>
+            </a:endParaRPr>
           </a:p>
           <a:p>
             <a:pPr algn="ctr">
@@ -4513,7 +3773,7 @@
             </a:pPr>
             <a:endParaRPr lang="en-US" sz="2200" b="1" cap="none" dirty="0" smtClean="0">
               <a:solidFill>
-                <a:schemeClr val="bg1"/>
+                <a:schemeClr val="tx1"/>
               </a:solidFill>
               <a:latin typeface="Times New Roman" panose="02020603050405020304" pitchFamily="18" charset="0"/>
               <a:cs typeface="Times New Roman" panose="02020603050405020304" pitchFamily="18" charset="0"/>
@@ -4527,7 +3787,7 @@
             </a:pPr>
             <a:endParaRPr lang="en-US" sz="2200" b="1" cap="none" dirty="0">
               <a:solidFill>
-                <a:schemeClr val="bg1"/>
+                <a:schemeClr val="tx1"/>
               </a:solidFill>
               <a:latin typeface="Times New Roman" panose="02020603050405020304" pitchFamily="18" charset="0"/>
               <a:cs typeface="Times New Roman" panose="02020603050405020304" pitchFamily="18" charset="0"/>
@@ -4541,7 +3801,7 @@
             </a:pPr>
             <a:endParaRPr lang="en-US" sz="2200" b="1" cap="none" dirty="0">
               <a:solidFill>
-                <a:schemeClr val="bg1"/>
+                <a:schemeClr val="tx1"/>
               </a:solidFill>
               <a:latin typeface="Times New Roman" panose="02020603050405020304" pitchFamily="18" charset="0"/>
               <a:cs typeface="Times New Roman" panose="02020603050405020304" pitchFamily="18" charset="0"/>
@@ -4551,10 +3811,73 @@
       </p:sp>
       <p:sp>
         <p:nvSpPr>
+          <p:cNvPr id="11" name="Date Placeholder 10">
+            <a:extLst>
+              <a:ext uri="{FF2B5EF4-FFF2-40B4-BE49-F238E27FC236}">
+                <a16:creationId xmlns="" xmlns:a16="http://schemas.microsoft.com/office/drawing/2014/main" id="{D65E36BC-99A0-200E-4D6C-13974E288826}"/>
+              </a:ext>
+            </a:extLst>
+          </p:cNvPr>
+          <p:cNvSpPr>
+            <a:spLocks noGrp="1"/>
+          </p:cNvSpPr>
+          <p:nvPr>
+            <p:ph type="dt" sz="half" idx="10"/>
+          </p:nvPr>
+        </p:nvSpPr>
+        <p:spPr>
+          <a:xfrm>
+            <a:off x="8855631" y="6414906"/>
+            <a:ext cx="2844800" cy="365125"/>
+          </a:xfrm>
+        </p:spPr>
+        <p:txBody>
+          <a:bodyPr/>
+          <a:lstStyle/>
+          <a:p>
+            <a:fld id="{11198C21-4875-48A5-A409-E0A086347292}" type="datetime1">
+              <a:rPr lang="en-IN" smtClean="0"/>
+              <a:t>21-07-2026</a:t>
+            </a:fld>
+            <a:endParaRPr lang="en-IN" dirty="0"/>
+          </a:p>
+        </p:txBody>
+      </p:sp>
+      <p:sp>
+        <p:nvSpPr>
+          <p:cNvPr id="13" name="Slide Number Placeholder 12">
+            <a:extLst>
+              <a:ext uri="{FF2B5EF4-FFF2-40B4-BE49-F238E27FC236}">
+                <a16:creationId xmlns="" xmlns:a16="http://schemas.microsoft.com/office/drawing/2014/main" id="{82966C9D-8540-8AC0-305E-CA27AA3646C5}"/>
+              </a:ext>
+            </a:extLst>
+          </p:cNvPr>
+          <p:cNvSpPr>
+            <a:spLocks noGrp="1"/>
+          </p:cNvSpPr>
+          <p:nvPr>
+            <p:ph type="sldNum" sz="quarter" idx="12"/>
+          </p:nvPr>
+        </p:nvSpPr>
+        <p:spPr/>
+        <p:txBody>
+          <a:bodyPr/>
+          <a:lstStyle/>
+          <a:p>
+            <a:fld id="{8D1C8765-CB22-4976-8758-5A372A2DCF34}" type="slidenum">
+              <a:rPr lang="en-IN" smtClean="0"/>
+              <a:t>1</a:t>
+            </a:fld>
+            <a:endParaRPr lang="en-IN" dirty="0"/>
+          </a:p>
+        </p:txBody>
+      </p:sp>
+      <p:sp>
+        <p:nvSpPr>
           <p:cNvPr id="4" name="Title 1">
             <a:extLst>
               <a:ext uri="{FF2B5EF4-FFF2-40B4-BE49-F238E27FC236}">
-                <a16:creationId xmlns:a16="http://schemas.microsoft.com/office/drawing/2014/main" xmlns="" id="{927FC38E-5607-D503-CC89-CEAE270BBB54}"/>
+                <a16:creationId xmlns="" xmlns:a16="http://schemas.microsoft.com/office/drawing/2014/main" id="{927FC38E-5607-D503-CC89-CEAE270BBB54}"/>
               </a:ext>
             </a:extLst>
           </p:cNvPr>
@@ -4658,69 +3981,6 @@
           </a:p>
         </p:txBody>
       </p:sp>
-      <p:sp>
-        <p:nvSpPr>
-          <p:cNvPr id="11" name="Date Placeholder 10">
-            <a:extLst>
-              <a:ext uri="{FF2B5EF4-FFF2-40B4-BE49-F238E27FC236}">
-                <a16:creationId xmlns:a16="http://schemas.microsoft.com/office/drawing/2014/main" xmlns="" id="{D65E36BC-99A0-200E-4D6C-13974E288826}"/>
-              </a:ext>
-            </a:extLst>
-          </p:cNvPr>
-          <p:cNvSpPr>
-            <a:spLocks noGrp="1"/>
-          </p:cNvSpPr>
-          <p:nvPr>
-            <p:ph type="dt" sz="half" idx="10"/>
-          </p:nvPr>
-        </p:nvSpPr>
-        <p:spPr>
-          <a:xfrm>
-            <a:off x="8855631" y="6414906"/>
-            <a:ext cx="2844800" cy="365125"/>
-          </a:xfrm>
-        </p:spPr>
-        <p:txBody>
-          <a:bodyPr/>
-          <a:lstStyle/>
-          <a:p>
-            <a:fld id="{11198C21-4875-48A5-A409-E0A086347292}" type="datetime1">
-              <a:rPr lang="en-IN" smtClean="0"/>
-              <a:t>16-07-2026</a:t>
-            </a:fld>
-            <a:endParaRPr lang="en-IN" dirty="0"/>
-          </a:p>
-        </p:txBody>
-      </p:sp>
-      <p:sp>
-        <p:nvSpPr>
-          <p:cNvPr id="13" name="Slide Number Placeholder 12">
-            <a:extLst>
-              <a:ext uri="{FF2B5EF4-FFF2-40B4-BE49-F238E27FC236}">
-                <a16:creationId xmlns:a16="http://schemas.microsoft.com/office/drawing/2014/main" xmlns="" id="{82966C9D-8540-8AC0-305E-CA27AA3646C5}"/>
-              </a:ext>
-            </a:extLst>
-          </p:cNvPr>
-          <p:cNvSpPr>
-            <a:spLocks noGrp="1"/>
-          </p:cNvSpPr>
-          <p:nvPr>
-            <p:ph type="sldNum" sz="quarter" idx="12"/>
-          </p:nvPr>
-        </p:nvSpPr>
-        <p:spPr/>
-        <p:txBody>
-          <a:bodyPr/>
-          <a:lstStyle/>
-          <a:p>
-            <a:fld id="{8D1C8765-CB22-4976-8758-5A372A2DCF34}" type="slidenum">
-              <a:rPr lang="en-IN" smtClean="0"/>
-              <a:t>1</a:t>
-            </a:fld>
-            <a:endParaRPr lang="en-IN" dirty="0"/>
-          </a:p>
-        </p:txBody>
-      </p:sp>
     </p:spTree>
     <p:extLst>
       <p:ext uri="{BB962C8B-B14F-4D97-AF65-F5344CB8AC3E}">
@@ -5230,11 +4490,7 @@
             </a:r>
             <a:r>
               <a:rPr lang="en-IN"/>
-              <a:t>: </a:t>
-            </a:r>
-            <a:r>
-              <a:rPr lang="en-IN"/>
-              <a:t>https://github.com/keyurbrahmbhatt-eng/social-media-agent-repo/tree/main</a:t>
+              <a:t>: https://github.com/keyurbrahmbhatt-eng/social-media-agent-repo/tree/main</a:t>
             </a:r>
             <a:endParaRPr lang="en-IN" dirty="0"/>
           </a:p>
@@ -5457,7 +4713,9 @@
         </p:nvSpPr>
         <p:spPr/>
         <p:txBody>
-          <a:bodyPr/>
+          <a:bodyPr>
+            <a:normAutofit fontScale="90000"/>
+          </a:bodyPr>
           <a:lstStyle/>
           <a:p>
             <a:r>
@@ -5479,33 +4737,10 @@
       </p:sp>
       <p:sp>
         <p:nvSpPr>
-          <p:cNvPr id="6" name="Slide Number Placeholder 5"/>
-          <p:cNvSpPr>
-            <a:spLocks noGrp="1"/>
-          </p:cNvSpPr>
-          <p:nvPr>
-            <p:ph type="sldNum" sz="quarter" idx="12"/>
-          </p:nvPr>
-        </p:nvSpPr>
-        <p:spPr/>
-        <p:txBody>
-          <a:bodyPr/>
-          <a:lstStyle/>
-          <a:p>
-            <a:fld id="{8D1C8765-CB22-4976-8758-5A372A2DCF34}" type="slidenum">
-              <a:rPr lang="en-IN" smtClean="0"/>
-              <a:t>2</a:t>
-            </a:fld>
-            <a:endParaRPr lang="en-IN"/>
-          </a:p>
-        </p:txBody>
-      </p:sp>
-      <p:sp>
-        <p:nvSpPr>
           <p:cNvPr id="9" name="Content Placeholder 2">
             <a:extLst>
               <a:ext uri="{FF2B5EF4-FFF2-40B4-BE49-F238E27FC236}">
-                <a16:creationId xmlns:a16="http://schemas.microsoft.com/office/drawing/2014/main" xmlns="" id="{F8DBFB98-934B-0F86-D0EF-7E72A0040514}"/>
+                <a16:creationId xmlns="" xmlns:a16="http://schemas.microsoft.com/office/drawing/2014/main" id="{F8DBFB98-934B-0F86-D0EF-7E72A0040514}"/>
               </a:ext>
             </a:extLst>
           </p:cNvPr>
@@ -5581,6 +4816,37 @@
           </a:p>
         </p:txBody>
       </p:sp>
+      <p:sp>
+        <p:nvSpPr>
+          <p:cNvPr id="6" name="Slide Number Placeholder 5"/>
+          <p:cNvSpPr>
+            <a:spLocks noGrp="1"/>
+          </p:cNvSpPr>
+          <p:nvPr>
+            <p:ph type="sldNum" sz="quarter" idx="12"/>
+          </p:nvPr>
+        </p:nvSpPr>
+        <p:spPr/>
+        <p:txBody>
+          <a:bodyPr/>
+          <a:lstStyle/>
+          <a:p>
+            <a:fld id="{8D1C8765-CB22-4976-8758-5A372A2DCF34}" type="slidenum">
+              <a:rPr lang="en-IN" smtClean="0">
+                <a:solidFill>
+                  <a:schemeClr val="tx1"/>
+                </a:solidFill>
+              </a:rPr>
+              <a:t>2</a:t>
+            </a:fld>
+            <a:endParaRPr lang="en-IN">
+              <a:solidFill>
+                <a:schemeClr val="tx1"/>
+              </a:solidFill>
+            </a:endParaRPr>
+          </a:p>
+        </p:txBody>
+      </p:sp>
       <p:graphicFrame>
         <p:nvGraphicFramePr>
           <p:cNvPr id="7" name="Table 6"/>
@@ -5590,7 +4856,7 @@
           <p:nvPr>
             <p:extLst>
               <p:ext uri="{D42A27DB-BD31-4B8C-83A1-F6EECF244321}">
-                <p14:modId xmlns:p14="http://schemas.microsoft.com/office/powerpoint/2010/main" val="3999234561"/>
+                <p14:modId xmlns:p14="http://schemas.microsoft.com/office/powerpoint/2010/main" val="886034816"/>
               </p:ext>
             </p:extLst>
           </p:nvPr>
@@ -5889,7 +5155,7 @@
         <p:spPr/>
         <p:txBody>
           <a:bodyPr>
-            <a:normAutofit/>
+            <a:normAutofit fontScale="92500" lnSpcReduction="10000"/>
           </a:bodyPr>
           <a:lstStyle/>
           <a:p>
@@ -6190,7 +5456,7 @@
         </p:spPr>
         <p:txBody>
           <a:bodyPr>
-            <a:normAutofit fontScale="92500" lnSpcReduction="20000"/>
+            <a:normAutofit/>
           </a:bodyPr>
           <a:lstStyle/>
           <a:p>
@@ -6881,9 +6147,9 @@
 </file>
 
 <file path=ppt/theme/theme1.xml><?xml version="1.0" encoding="utf-8"?>
-<a:theme xmlns:a="http://schemas.openxmlformats.org/drawingml/2006/main" name="Dividend">
+<a:theme xmlns:a="http://schemas.openxmlformats.org/drawingml/2006/main" name="Office Theme">
   <a:themeElements>
-    <a:clrScheme name="Dividend">
+    <a:clrScheme name="Office">
       <a:dk1>
         <a:sysClr val="windowText" lastClr="000000"/>
       </a:dk1>
@@ -6891,48 +6157,81 @@
         <a:sysClr val="window" lastClr="FFFFFF"/>
       </a:lt1>
       <a:dk2>
-        <a:srgbClr val="3D3D3D"/>
+        <a:srgbClr val="1F497D"/>
       </a:dk2>
       <a:lt2>
-        <a:srgbClr val="EBEBEB"/>
+        <a:srgbClr val="EEECE1"/>
       </a:lt2>
       <a:accent1>
-        <a:srgbClr val="4D1434"/>
+        <a:srgbClr val="4F81BD"/>
       </a:accent1>
       <a:accent2>
-        <a:srgbClr val="903163"/>
+        <a:srgbClr val="C0504D"/>
       </a:accent2>
       <a:accent3>
-        <a:srgbClr val="B2324B"/>
+        <a:srgbClr val="9BBB59"/>
       </a:accent3>
       <a:accent4>
-        <a:srgbClr val="969FA7"/>
+        <a:srgbClr val="8064A2"/>
       </a:accent4>
       <a:accent5>
-        <a:srgbClr val="66B1CE"/>
+        <a:srgbClr val="4BACC6"/>
       </a:accent5>
       <a:accent6>
-        <a:srgbClr val="40619D"/>
+        <a:srgbClr val="F79646"/>
       </a:accent6>
       <a:hlink>
-        <a:srgbClr val="828282"/>
+        <a:srgbClr val="0000FF"/>
       </a:hlink>
       <a:folHlink>
-        <a:srgbClr val="A5A5A5"/>
+        <a:srgbClr val="800080"/>
       </a:folHlink>
     </a:clrScheme>
-    <a:fontScheme name="Dividend">
+    <a:fontScheme name="Office">
       <a:majorFont>
-        <a:latin typeface="Gill Sans MT"/>
+        <a:latin typeface="Calibri"/>
         <a:ea typeface=""/>
         <a:cs typeface=""/>
-        <a:font script="Grek" typeface="Corbel"/>
-        <a:font script="Cyrl" typeface="Corbel"/>
-        <a:font script="Jpan" typeface="HGｺﾞｼｯｸE"/>
-        <a:font script="Hang" typeface="휴먼매직체"/>
-        <a:font script="Hans" typeface="华文中宋"/>
-        <a:font script="Hant" typeface="微軟正黑體"/>
-        <a:font script="Arab" typeface="Majalla UI"/>
+        <a:font script="Jpan" typeface="ＭＳ Ｐゴシック"/>
+        <a:font script="Hang" typeface="맑은 고딕"/>
+        <a:font script="Hans" typeface="宋体"/>
+        <a:font script="Hant" typeface="新細明體"/>
+        <a:font script="Arab" typeface="Times New Roman"/>
+        <a:font script="Hebr" typeface="Times New Roman"/>
+        <a:font script="Thai" typeface="Angsana New"/>
+        <a:font script="Ethi" typeface="Nyala"/>
+        <a:font script="Beng" typeface="Vrinda"/>
+        <a:font script="Gujr" typeface="Shruti"/>
+        <a:font script="Khmr" typeface="MoolBoran"/>
+        <a:font script="Knda" typeface="Tunga"/>
+        <a:font script="Guru" typeface="Raavi"/>
+        <a:font script="Cans" typeface="Euphemia"/>
+        <a:font script="Cher" typeface="Plantagenet Cherokee"/>
+        <a:font script="Yiii" typeface="Microsoft Yi Baiti"/>
+        <a:font script="Tibt" typeface="Microsoft Himalaya"/>
+        <a:font script="Thaa" typeface="MV Boli"/>
+        <a:font script="Deva" typeface="Mangal"/>
+        <a:font script="Telu" typeface="Gautami"/>
+        <a:font script="Taml" typeface="Latha"/>
+        <a:font script="Syrc" typeface="Estrangelo Edessa"/>
+        <a:font script="Orya" typeface="Kalinga"/>
+        <a:font script="Mlym" typeface="Kartika"/>
+        <a:font script="Laoo" typeface="DokChampa"/>
+        <a:font script="Sinh" typeface="Iskoola Pota"/>
+        <a:font script="Mong" typeface="Mongolian Baiti"/>
+        <a:font script="Viet" typeface="Times New Roman"/>
+        <a:font script="Uigh" typeface="Microsoft Uighur"/>
+        <a:font script="Geor" typeface="Sylfaen"/>
+      </a:majorFont>
+      <a:minorFont>
+        <a:latin typeface="Calibri"/>
+        <a:ea typeface=""/>
+        <a:cs typeface=""/>
+        <a:font script="Jpan" typeface="ＭＳ Ｐゴシック"/>
+        <a:font script="Hang" typeface="맑은 고딕"/>
+        <a:font script="Hans" typeface="宋体"/>
+        <a:font script="Hant" typeface="新細明體"/>
+        <a:font script="Arab" typeface="Arial"/>
         <a:font script="Hebr" typeface="Arial"/>
         <a:font script="Thai" typeface="Cordia New"/>
         <a:font script="Ethi" typeface="Nyala"/>
@@ -6955,49 +6254,12 @@
         <a:font script="Laoo" typeface="DokChampa"/>
         <a:font script="Sinh" typeface="Iskoola Pota"/>
         <a:font script="Mong" typeface="Mongolian Baiti"/>
-        <a:font script="Viet" typeface="Tahoma"/>
-        <a:font script="Uigh" typeface="Microsoft Uighur"/>
-        <a:font script="Geor" typeface="Sylfaen"/>
-      </a:majorFont>
-      <a:minorFont>
-        <a:latin typeface="Gill Sans MT"/>
-        <a:ea typeface=""/>
-        <a:cs typeface=""/>
-        <a:font script="Grek" typeface="Corbel"/>
-        <a:font script="Cyrl" typeface="Corbel"/>
-        <a:font script="Jpan" typeface="HGｺﾞｼｯｸE"/>
-        <a:font script="Hang" typeface="휴먼매직체"/>
-        <a:font script="Hans" typeface="华文中宋"/>
-        <a:font script="Hant" typeface="微軟正黑體"/>
-        <a:font script="Arab" typeface="Majalla UI"/>
-        <a:font script="Hebr" typeface="Arial"/>
-        <a:font script="Thai" typeface="Cordia New"/>
-        <a:font script="Ethi" typeface="Nyala"/>
-        <a:font script="Beng" typeface="Vrinda"/>
-        <a:font script="Gujr" typeface="Shruti"/>
-        <a:font script="Khmr" typeface="DaunPenh"/>
-        <a:font script="Knda" typeface="Tunga"/>
-        <a:font script="Guru" typeface="Raavi"/>
-        <a:font script="Cans" typeface="Euphemia"/>
-        <a:font script="Cher" typeface="Plantagenet Cherokee"/>
-        <a:font script="Yiii" typeface="Microsoft Yi Baiti"/>
-        <a:font script="Tibt" typeface="Microsoft Himalaya"/>
-        <a:font script="Thaa" typeface="MV Boli"/>
-        <a:font script="Deva" typeface="Mangal"/>
-        <a:font script="Telu" typeface="Gautami"/>
-        <a:font script="Taml" typeface="Latha"/>
-        <a:font script="Syrc" typeface="Estrangelo Edessa"/>
-        <a:font script="Orya" typeface="Kalinga"/>
-        <a:font script="Mlym" typeface="Kartika"/>
-        <a:font script="Laoo" typeface="DokChampa"/>
-        <a:font script="Sinh" typeface="Iskoola Pota"/>
-        <a:font script="Mong" typeface="Mongolian Baiti"/>
-        <a:font script="Viet" typeface="Tahoma"/>
+        <a:font script="Viet" typeface="Arial"/>
         <a:font script="Uigh" typeface="Microsoft Uighur"/>
         <a:font script="Geor" typeface="Sylfaen"/>
       </a:minorFont>
     </a:fontScheme>
-    <a:fmtScheme name="Dividend">
+    <a:fmtScheme name="Office">
       <a:fillStyleLst>
         <a:solidFill>
           <a:schemeClr val="phClr"/>
@@ -7006,54 +6268,66 @@
           <a:gsLst>
             <a:gs pos="0">
               <a:schemeClr val="phClr">
-                <a:tint val="68000"/>
-                <a:alpha val="90000"/>
-                <a:lumMod val="100000"/>
+                <a:tint val="50000"/>
+                <a:satMod val="300000"/>
+              </a:schemeClr>
+            </a:gs>
+            <a:gs pos="35000">
+              <a:schemeClr val="phClr">
+                <a:tint val="37000"/>
+                <a:satMod val="300000"/>
               </a:schemeClr>
             </a:gs>
             <a:gs pos="100000">
               <a:schemeClr val="phClr">
-                <a:tint val="90000"/>
-                <a:lumMod val="95000"/>
+                <a:tint val="15000"/>
+                <a:satMod val="350000"/>
               </a:schemeClr>
             </a:gs>
           </a:gsLst>
-          <a:lin ang="5400000" scaled="1"/>
+          <a:lin ang="16200000" scaled="1"/>
         </a:gradFill>
         <a:gradFill rotWithShape="1">
           <a:gsLst>
             <a:gs pos="0">
               <a:schemeClr val="phClr">
-                <a:tint val="98000"/>
-                <a:lumMod val="110000"/>
+                <a:shade val="51000"/>
+                <a:satMod val="130000"/>
               </a:schemeClr>
             </a:gs>
-            <a:gs pos="84000">
+            <a:gs pos="80000">
               <a:schemeClr val="phClr">
-                <a:shade val="90000"/>
-                <a:lumMod val="88000"/>
+                <a:shade val="93000"/>
+                <a:satMod val="130000"/>
+              </a:schemeClr>
+            </a:gs>
+            <a:gs pos="100000">
+              <a:schemeClr val="phClr">
+                <a:shade val="94000"/>
+                <a:satMod val="135000"/>
               </a:schemeClr>
             </a:gs>
           </a:gsLst>
-          <a:lin ang="5400000" scaled="0"/>
+          <a:lin ang="16200000" scaled="0"/>
         </a:gradFill>
       </a:fillStyleLst>
       <a:lnStyleLst>
-        <a:ln w="12700" cap="rnd" cmpd="sng" algn="ctr">
+        <a:ln w="9525" cap="flat" cmpd="sng" algn="ctr">
           <a:solidFill>
             <a:schemeClr val="phClr">
-              <a:lumMod val="90000"/>
+              <a:shade val="95000"/>
+              <a:satMod val="105000"/>
             </a:schemeClr>
           </a:solidFill>
           <a:prstDash val="solid"/>
         </a:ln>
-        <a:ln w="22225" cap="rnd" cmpd="sng" algn="ctr">
+        <a:ln w="25400" cap="flat" cmpd="sng" algn="ctr">
           <a:solidFill>
             <a:schemeClr val="phClr"/>
           </a:solidFill>
           <a:prstDash val="solid"/>
         </a:ln>
-        <a:ln w="25400" cap="rnd" cmpd="sng" algn="ctr">
+        <a:ln w="38100" cap="flat" cmpd="sng" algn="ctr">
           <a:solidFill>
             <a:schemeClr val="phClr"/>
           </a:solidFill>
@@ -7062,22 +6336,28 @@
       </a:lnStyleLst>
       <a:effectStyleLst>
         <a:effectStyle>
-          <a:effectLst/>
-        </a:effectStyle>
-        <a:effectStyle>
           <a:effectLst>
-            <a:outerShdw blurRad="38100" dist="25400" dir="5400000" rotWithShape="0">
+            <a:outerShdw blurRad="40000" dist="20000" dir="5400000" rotWithShape="0">
               <a:srgbClr val="000000">
-                <a:alpha val="55000"/>
+                <a:alpha val="38000"/>
               </a:srgbClr>
             </a:outerShdw>
           </a:effectLst>
         </a:effectStyle>
         <a:effectStyle>
           <a:effectLst>
-            <a:outerShdw blurRad="88900" dist="38100" dir="5040000" rotWithShape="0">
+            <a:outerShdw blurRad="40000" dist="23000" dir="5400000" rotWithShape="0">
               <a:srgbClr val="000000">
-                <a:alpha val="60000"/>
+                <a:alpha val="35000"/>
+              </a:srgbClr>
+            </a:outerShdw>
+          </a:effectLst>
+        </a:effectStyle>
+        <a:effectStyle>
+          <a:effectLst>
+            <a:outerShdw blurRad="40000" dist="23000" dir="5400000" rotWithShape="0">
+              <a:srgbClr val="000000">
+                <a:alpha val="35000"/>
               </a:srgbClr>
             </a:outerShdw>
           </a:effectLst>
@@ -7085,12 +6365,12 @@
             <a:camera prst="orthographicFront">
               <a:rot lat="0" lon="0" rev="0"/>
             </a:camera>
-            <a:lightRig rig="threePt" dir="tl">
+            <a:lightRig rig="threePt" dir="t">
               <a:rot lat="0" lon="0" rev="1200000"/>
             </a:lightRig>
           </a:scene3d>
           <a:sp3d>
-            <a:bevelT w="38100" h="50800"/>
+            <a:bevelT w="63500" h="25400"/>
           </a:sp3d>
         </a:effectStyle>
       </a:effectStyleLst>
@@ -7102,38 +6382,45 @@
           <a:gsLst>
             <a:gs pos="0">
               <a:schemeClr val="phClr">
-                <a:tint val="90000"/>
-                <a:lumMod val="110000"/>
+                <a:tint val="40000"/>
+                <a:satMod val="350000"/>
               </a:schemeClr>
             </a:gs>
-            <a:gs pos="88000">
+            <a:gs pos="40000">
               <a:schemeClr val="phClr">
-                <a:shade val="94000"/>
-                <a:satMod val="110000"/>
-                <a:lumMod val="88000"/>
+                <a:tint val="45000"/>
+                <a:shade val="99000"/>
+                <a:satMod val="350000"/>
+              </a:schemeClr>
+            </a:gs>
+            <a:gs pos="100000">
+              <a:schemeClr val="phClr">
+                <a:shade val="20000"/>
+                <a:satMod val="255000"/>
               </a:schemeClr>
             </a:gs>
           </a:gsLst>
-          <a:lin ang="5400000" scaled="0"/>
+          <a:path path="circle">
+            <a:fillToRect l="50000" t="-80000" r="50000" b="180000"/>
+          </a:path>
         </a:gradFill>
         <a:gradFill rotWithShape="1">
           <a:gsLst>
             <a:gs pos="0">
               <a:schemeClr val="phClr">
-                <a:tint val="90000"/>
-                <a:lumMod val="110000"/>
+                <a:tint val="80000"/>
+                <a:satMod val="300000"/>
               </a:schemeClr>
             </a:gs>
             <a:gs pos="100000">
               <a:schemeClr val="phClr">
-                <a:shade val="98000"/>
-                <a:satMod val="110000"/>
-                <a:lumMod val="86000"/>
+                <a:shade val="30000"/>
+                <a:satMod val="200000"/>
               </a:schemeClr>
             </a:gs>
           </a:gsLst>
           <a:path path="circle">
-            <a:fillToRect l="50000" t="50000" r="100000" b="100000"/>
+            <a:fillToRect l="50000" t="50000" r="50000" b="50000"/>
           </a:path>
         </a:gradFill>
       </a:bgFillStyleLst>
@@ -7141,11 +6428,6 @@
   </a:themeElements>
   <a:objectDefaults/>
   <a:extraClrSchemeLst/>
-  <a:extLst>
-    <a:ext uri="{05A4C25C-085E-4340-85A3-A5531E510DB2}">
-      <thm15:themeFamily xmlns:thm15="http://schemas.microsoft.com/office/thememl/2012/main" xmlns="" name="Dividend" id="{9697A71B-4AB7-4A1A-BD5B-BB2D22835B57}" vid="{C21699FF-00E4-43C8-BBCC-D7E5536C3717}"/>
-    </a:ext>
-  </a:extLst>
 </a:theme>
 </file>
 
@@ -7438,7 +6720,7 @@
   <a:extraClrSchemeLst/>
   <a:extLst>
     <a:ext uri="{05A4C25C-085E-4340-85A3-A5531E510DB2}">
-      <thm15:themeFamily xmlns:thm15="http://schemas.microsoft.com/office/thememl/2012/main" xmlns="" name="Office Theme" id="{62F939B6-93AF-4DB8-9C6B-D6C7DFDC589F}" vid="{4A3C46E8-61CC-4603-A589-7422A47A8E4A}"/>
+      <thm15:themeFamily xmlns="" xmlns:thm15="http://schemas.microsoft.com/office/thememl/2012/main" name="Office Theme" id="{62F939B6-93AF-4DB8-9C6B-D6C7DFDC589F}" vid="{4A3C46E8-61CC-4603-A589-7422A47A8E4A}"/>
     </a:ext>
   </a:extLst>
 </a:theme>
